--- a/Simulationen_und_Dokumentationen/Dokumentationen/Schule/Präsentation-Jahresprojekt.pptx
+++ b/Simulationen_und_Dokumentationen/Dokumentationen/Schule/Präsentation-Jahresprojekt.pptx
@@ -5,30 +5,28 @@
     <p:sldMasterId id="2147483693" r:id="rId1"/>
   </p:sldMasterIdLst>
   <p:notesMasterIdLst>
-    <p:notesMasterId r:id="rId23"/>
+    <p:notesMasterId r:id="rId21"/>
   </p:notesMasterIdLst>
   <p:sldIdLst>
     <p:sldId id="256" r:id="rId2"/>
     <p:sldId id="276" r:id="rId3"/>
-    <p:sldId id="281" r:id="rId4"/>
-    <p:sldId id="275" r:id="rId5"/>
-    <p:sldId id="289" r:id="rId6"/>
-    <p:sldId id="282" r:id="rId7"/>
-    <p:sldId id="290" r:id="rId8"/>
-    <p:sldId id="291" r:id="rId9"/>
-    <p:sldId id="287" r:id="rId10"/>
-    <p:sldId id="293" r:id="rId11"/>
-    <p:sldId id="295" r:id="rId12"/>
-    <p:sldId id="294" r:id="rId13"/>
-    <p:sldId id="296" r:id="rId14"/>
-    <p:sldId id="297" r:id="rId15"/>
-    <p:sldId id="298" r:id="rId16"/>
-    <p:sldId id="288" r:id="rId17"/>
-    <p:sldId id="292" r:id="rId18"/>
-    <p:sldId id="284" r:id="rId19"/>
-    <p:sldId id="285" r:id="rId20"/>
-    <p:sldId id="286" r:id="rId21"/>
-    <p:sldId id="271" r:id="rId22"/>
+    <p:sldId id="289" r:id="rId4"/>
+    <p:sldId id="282" r:id="rId5"/>
+    <p:sldId id="290" r:id="rId6"/>
+    <p:sldId id="291" r:id="rId7"/>
+    <p:sldId id="299" r:id="rId8"/>
+    <p:sldId id="293" r:id="rId9"/>
+    <p:sldId id="295" r:id="rId10"/>
+    <p:sldId id="294" r:id="rId11"/>
+    <p:sldId id="296" r:id="rId12"/>
+    <p:sldId id="297" r:id="rId13"/>
+    <p:sldId id="298" r:id="rId14"/>
+    <p:sldId id="288" r:id="rId15"/>
+    <p:sldId id="292" r:id="rId16"/>
+    <p:sldId id="284" r:id="rId17"/>
+    <p:sldId id="285" r:id="rId18"/>
+    <p:sldId id="286" r:id="rId19"/>
+    <p:sldId id="271" r:id="rId20"/>
   </p:sldIdLst>
   <p:sldSz cx="20104100" cy="11258550"/>
   <p:notesSz cx="20104100" cy="11258550"/>
@@ -130,7 +128,7 @@
           <a:p>
             <a:fld id="{9B32CCA1-4475-43BB-8E25-41D5FBD7FEC8}" type="datetimeFigureOut">
               <a:rPr lang="de-AT" smtClean="0"/>
-              <a:t>05.03.2026</a:t>
+              <a:t>15.05.2026</a:t>
             </a:fld>
             <a:endParaRPr lang="de-AT" dirty="0"/>
           </a:p>
@@ -9702,7 +9700,7 @@
           <a:p>
             <a:fld id="{1D8BD707-D9CF-40AE-B4C6-C98DA3205C09}" type="datetimeFigureOut">
               <a:rPr lang="en-US"/>
-              <a:t>3/5/2026</a:t>
+              <a:t>5/15/2026</a:t>
             </a:fld>
             <a:endParaRPr lang="en-US" dirty="0"/>
           </a:p>
@@ -9970,7 +9968,7 @@
           <a:p>
             <a:fld id="{1D8BD707-D9CF-40AE-B4C6-C98DA3205C09}" type="datetimeFigureOut">
               <a:rPr lang="en-US"/>
-              <a:t>3/5/2026</a:t>
+              <a:t>5/15/2026</a:t>
             </a:fld>
             <a:endParaRPr lang="en-US" dirty="0"/>
           </a:p>
@@ -10071,10 +10069,10 @@
           <p:nvPr userDrawn="1"/>
         </p:nvPicPr>
         <p:blipFill>
-          <a:blip r:embed="rId3">
+          <a:blip>
             <a:extLst>
               <a:ext uri="{96DAC541-7B7A-43D3-8B79-37D633B846F1}">
-                <asvg:svgBlip xmlns:asvg="http://schemas.microsoft.com/office/drawing/2016/SVG/main" r:embed="rId4"/>
+                <asvg:svgBlip xmlns:asvg="http://schemas.microsoft.com/office/drawing/2016/SVG/main" r:embed="rId3"/>
               </a:ext>
             </a:extLst>
           </a:blip>
@@ -10107,10 +10105,10 @@
           <p:nvPr userDrawn="1"/>
         </p:nvPicPr>
         <p:blipFill>
-          <a:blip r:embed="rId5">
+          <a:blip>
             <a:extLst>
               <a:ext uri="{96DAC541-7B7A-43D3-8B79-37D633B846F1}">
-                <asvg:svgBlip xmlns:asvg="http://schemas.microsoft.com/office/drawing/2016/SVG/main" r:embed="rId6"/>
+                <asvg:svgBlip xmlns:asvg="http://schemas.microsoft.com/office/drawing/2016/SVG/main" r:embed="rId4"/>
               </a:ext>
             </a:extLst>
           </a:blip>
@@ -10143,10 +10141,10 @@
           <p:nvPr userDrawn="1"/>
         </p:nvPicPr>
         <p:blipFill>
-          <a:blip r:embed="rId7">
+          <a:blip>
             <a:extLst>
               <a:ext uri="{96DAC541-7B7A-43D3-8B79-37D633B846F1}">
-                <asvg:svgBlip xmlns:asvg="http://schemas.microsoft.com/office/drawing/2016/SVG/main" r:embed="rId8"/>
+                <asvg:svgBlip xmlns:asvg="http://schemas.microsoft.com/office/drawing/2016/SVG/main" r:embed="rId5"/>
               </a:ext>
             </a:extLst>
           </a:blip>
@@ -10179,10 +10177,10 @@
           <p:nvPr userDrawn="1"/>
         </p:nvPicPr>
         <p:blipFill>
-          <a:blip r:embed="rId9">
+          <a:blip>
             <a:extLst>
               <a:ext uri="{96DAC541-7B7A-43D3-8B79-37D633B846F1}">
-                <asvg:svgBlip xmlns:asvg="http://schemas.microsoft.com/office/drawing/2016/SVG/main" r:embed="rId10"/>
+                <asvg:svgBlip xmlns:asvg="http://schemas.microsoft.com/office/drawing/2016/SVG/main" r:embed="rId6"/>
               </a:ext>
             </a:extLst>
           </a:blip>
@@ -10215,10 +10213,10 @@
           <p:nvPr userDrawn="1"/>
         </p:nvPicPr>
         <p:blipFill>
-          <a:blip r:embed="rId11">
+          <a:blip>
             <a:extLst>
               <a:ext uri="{96DAC541-7B7A-43D3-8B79-37D633B846F1}">
-                <asvg:svgBlip xmlns:asvg="http://schemas.microsoft.com/office/drawing/2016/SVG/main" r:embed="rId12"/>
+                <asvg:svgBlip xmlns:asvg="http://schemas.microsoft.com/office/drawing/2016/SVG/main" r:embed="rId7"/>
               </a:ext>
             </a:extLst>
           </a:blip>
@@ -10251,10 +10249,10 @@
           <p:nvPr userDrawn="1"/>
         </p:nvPicPr>
         <p:blipFill>
-          <a:blip r:embed="rId13">
+          <a:blip>
             <a:extLst>
               <a:ext uri="{96DAC541-7B7A-43D3-8B79-37D633B846F1}">
-                <asvg:svgBlip xmlns:asvg="http://schemas.microsoft.com/office/drawing/2016/SVG/main" r:embed="rId14"/>
+                <asvg:svgBlip xmlns:asvg="http://schemas.microsoft.com/office/drawing/2016/SVG/main" r:embed="rId8"/>
               </a:ext>
             </a:extLst>
           </a:blip>
@@ -10287,10 +10285,10 @@
           <p:nvPr userDrawn="1"/>
         </p:nvPicPr>
         <p:blipFill>
-          <a:blip r:embed="rId15">
+          <a:blip>
             <a:extLst>
               <a:ext uri="{96DAC541-7B7A-43D3-8B79-37D633B846F1}">
-                <asvg:svgBlip xmlns:asvg="http://schemas.microsoft.com/office/drawing/2016/SVG/main" r:embed="rId16"/>
+                <asvg:svgBlip xmlns:asvg="http://schemas.microsoft.com/office/drawing/2016/SVG/main" r:embed="rId9"/>
               </a:ext>
             </a:extLst>
           </a:blip>
@@ -10323,10 +10321,10 @@
           <p:nvPr userDrawn="1"/>
         </p:nvPicPr>
         <p:blipFill>
-          <a:blip r:embed="rId17">
+          <a:blip>
             <a:extLst>
               <a:ext uri="{96DAC541-7B7A-43D3-8B79-37D633B846F1}">
-                <asvg:svgBlip xmlns:asvg="http://schemas.microsoft.com/office/drawing/2016/SVG/main" r:embed="rId18"/>
+                <asvg:svgBlip xmlns:asvg="http://schemas.microsoft.com/office/drawing/2016/SVG/main" r:embed="rId10"/>
               </a:ext>
             </a:extLst>
           </a:blip>
@@ -10359,7 +10357,7 @@
           <p:nvPr userDrawn="1"/>
         </p:nvPicPr>
         <p:blipFill>
-          <a:blip r:embed="rId19" cstate="print">
+          <a:blip r:embed="rId11" cstate="print">
             <a:extLst>
               <a:ext uri="{28A0092B-C50C-407E-A947-70E740481C1C}">
                 <a14:useLocalDpi xmlns:a14="http://schemas.microsoft.com/office/drawing/2010/main" val="0"/>
@@ -10395,10 +10393,10 @@
           <p:nvPr userDrawn="1"/>
         </p:nvPicPr>
         <p:blipFill>
-          <a:blip r:embed="rId20">
+          <a:blip>
             <a:extLst>
               <a:ext uri="{96DAC541-7B7A-43D3-8B79-37D633B846F1}">
-                <asvg:svgBlip xmlns:asvg="http://schemas.microsoft.com/office/drawing/2016/SVG/main" r:embed="rId21"/>
+                <asvg:svgBlip xmlns:asvg="http://schemas.microsoft.com/office/drawing/2016/SVG/main" r:embed="rId12"/>
               </a:ext>
             </a:extLst>
           </a:blip>
@@ -10431,10 +10429,10 @@
           <p:nvPr userDrawn="1"/>
         </p:nvPicPr>
         <p:blipFill>
-          <a:blip r:embed="rId22">
+          <a:blip>
             <a:extLst>
               <a:ext uri="{96DAC541-7B7A-43D3-8B79-37D633B846F1}">
-                <asvg:svgBlip xmlns:asvg="http://schemas.microsoft.com/office/drawing/2016/SVG/main" r:embed="rId23"/>
+                <asvg:svgBlip xmlns:asvg="http://schemas.microsoft.com/office/drawing/2016/SVG/main" r:embed="rId13"/>
               </a:ext>
             </a:extLst>
           </a:blip>
@@ -10506,10 +10504,10 @@
           <p:nvPr userDrawn="1"/>
         </p:nvPicPr>
         <p:blipFill>
-          <a:blip r:embed="rId24">
+          <a:blip>
             <a:extLst>
               <a:ext uri="{96DAC541-7B7A-43D3-8B79-37D633B846F1}">
-                <asvg:svgBlip xmlns:asvg="http://schemas.microsoft.com/office/drawing/2016/SVG/main" r:embed="rId25"/>
+                <asvg:svgBlip xmlns:asvg="http://schemas.microsoft.com/office/drawing/2016/SVG/main" r:embed="rId14"/>
               </a:ext>
             </a:extLst>
           </a:blip>
@@ -10745,7 +10743,7 @@
           <a:p>
             <a:fld id="{1D8BD707-D9CF-40AE-B4C6-C98DA3205C09}" type="datetimeFigureOut">
               <a:rPr lang="en-US"/>
-              <a:t>3/5/2026</a:t>
+              <a:t>5/15/2026</a:t>
             </a:fld>
             <a:endParaRPr lang="en-US" dirty="0"/>
           </a:p>
@@ -10852,10 +10850,10 @@
           <p:nvPr userDrawn="1"/>
         </p:nvPicPr>
         <p:blipFill>
-          <a:blip r:embed="rId2">
+          <a:blip>
             <a:extLst>
               <a:ext uri="{96DAC541-7B7A-43D3-8B79-37D633B846F1}">
-                <asvg:svgBlip xmlns:asvg="http://schemas.microsoft.com/office/drawing/2016/SVG/main" r:embed="rId3"/>
+                <asvg:svgBlip xmlns:asvg="http://schemas.microsoft.com/office/drawing/2016/SVG/main" r:embed="rId2"/>
               </a:ext>
             </a:extLst>
           </a:blip>
@@ -10888,10 +10886,10 @@
           <p:nvPr userDrawn="1"/>
         </p:nvPicPr>
         <p:blipFill>
-          <a:blip r:embed="rId4">
+          <a:blip>
             <a:extLst>
               <a:ext uri="{96DAC541-7B7A-43D3-8B79-37D633B846F1}">
-                <asvg:svgBlip xmlns:asvg="http://schemas.microsoft.com/office/drawing/2016/SVG/main" r:embed="rId5"/>
+                <asvg:svgBlip xmlns:asvg="http://schemas.microsoft.com/office/drawing/2016/SVG/main" r:embed="rId3"/>
               </a:ext>
             </a:extLst>
           </a:blip>
@@ -10924,10 +10922,10 @@
           <p:nvPr userDrawn="1"/>
         </p:nvPicPr>
         <p:blipFill>
-          <a:blip r:embed="rId6">
+          <a:blip>
             <a:extLst>
               <a:ext uri="{96DAC541-7B7A-43D3-8B79-37D633B846F1}">
-                <asvg:svgBlip xmlns:asvg="http://schemas.microsoft.com/office/drawing/2016/SVG/main" r:embed="rId7"/>
+                <asvg:svgBlip xmlns:asvg="http://schemas.microsoft.com/office/drawing/2016/SVG/main" r:embed="rId4"/>
               </a:ext>
             </a:extLst>
           </a:blip>
@@ -10960,10 +10958,10 @@
           <p:nvPr userDrawn="1"/>
         </p:nvPicPr>
         <p:blipFill>
-          <a:blip r:embed="rId8">
+          <a:blip>
             <a:extLst>
               <a:ext uri="{96DAC541-7B7A-43D3-8B79-37D633B846F1}">
-                <asvg:svgBlip xmlns:asvg="http://schemas.microsoft.com/office/drawing/2016/SVG/main" r:embed="rId9"/>
+                <asvg:svgBlip xmlns:asvg="http://schemas.microsoft.com/office/drawing/2016/SVG/main" r:embed="rId5"/>
               </a:ext>
             </a:extLst>
           </a:blip>
@@ -10996,10 +10994,10 @@
           <p:nvPr userDrawn="1"/>
         </p:nvPicPr>
         <p:blipFill>
-          <a:blip r:embed="rId10">
+          <a:blip>
             <a:extLst>
               <a:ext uri="{96DAC541-7B7A-43D3-8B79-37D633B846F1}">
-                <asvg:svgBlip xmlns:asvg="http://schemas.microsoft.com/office/drawing/2016/SVG/main" r:embed="rId11"/>
+                <asvg:svgBlip xmlns:asvg="http://schemas.microsoft.com/office/drawing/2016/SVG/main" r:embed="rId6"/>
               </a:ext>
             </a:extLst>
           </a:blip>
@@ -11032,10 +11030,10 @@
           <p:nvPr userDrawn="1"/>
         </p:nvPicPr>
         <p:blipFill>
-          <a:blip r:embed="rId12">
+          <a:blip>
             <a:extLst>
               <a:ext uri="{96DAC541-7B7A-43D3-8B79-37D633B846F1}">
-                <asvg:svgBlip xmlns:asvg="http://schemas.microsoft.com/office/drawing/2016/SVG/main" r:embed="rId13"/>
+                <asvg:svgBlip xmlns:asvg="http://schemas.microsoft.com/office/drawing/2016/SVG/main" r:embed="rId7"/>
               </a:ext>
             </a:extLst>
           </a:blip>
@@ -11068,10 +11066,10 @@
           <p:nvPr userDrawn="1"/>
         </p:nvPicPr>
         <p:blipFill>
-          <a:blip r:embed="rId14">
+          <a:blip>
             <a:extLst>
               <a:ext uri="{96DAC541-7B7A-43D3-8B79-37D633B846F1}">
-                <asvg:svgBlip xmlns:asvg="http://schemas.microsoft.com/office/drawing/2016/SVG/main" r:embed="rId15"/>
+                <asvg:svgBlip xmlns:asvg="http://schemas.microsoft.com/office/drawing/2016/SVG/main" r:embed="rId8"/>
               </a:ext>
             </a:extLst>
           </a:blip>
@@ -11104,10 +11102,10 @@
           <p:nvPr userDrawn="1"/>
         </p:nvPicPr>
         <p:blipFill>
-          <a:blip r:embed="rId16">
+          <a:blip>
             <a:extLst>
               <a:ext uri="{96DAC541-7B7A-43D3-8B79-37D633B846F1}">
-                <asvg:svgBlip xmlns:asvg="http://schemas.microsoft.com/office/drawing/2016/SVG/main" r:embed="rId17"/>
+                <asvg:svgBlip xmlns:asvg="http://schemas.microsoft.com/office/drawing/2016/SVG/main" r:embed="rId9"/>
               </a:ext>
             </a:extLst>
           </a:blip>
@@ -11140,10 +11138,10 @@
           <p:nvPr userDrawn="1"/>
         </p:nvPicPr>
         <p:blipFill>
-          <a:blip r:embed="rId18">
+          <a:blip>
             <a:extLst>
               <a:ext uri="{96DAC541-7B7A-43D3-8B79-37D633B846F1}">
-                <asvg:svgBlip xmlns:asvg="http://schemas.microsoft.com/office/drawing/2016/SVG/main" r:embed="rId19"/>
+                <asvg:svgBlip xmlns:asvg="http://schemas.microsoft.com/office/drawing/2016/SVG/main" r:embed="rId10"/>
               </a:ext>
             </a:extLst>
           </a:blip>
@@ -11176,10 +11174,10 @@
           <p:nvPr userDrawn="1"/>
         </p:nvPicPr>
         <p:blipFill>
-          <a:blip r:embed="rId20">
+          <a:blip>
             <a:extLst>
               <a:ext uri="{96DAC541-7B7A-43D3-8B79-37D633B846F1}">
-                <asvg:svgBlip xmlns:asvg="http://schemas.microsoft.com/office/drawing/2016/SVG/main" r:embed="rId21"/>
+                <asvg:svgBlip xmlns:asvg="http://schemas.microsoft.com/office/drawing/2016/SVG/main" r:embed="rId11"/>
               </a:ext>
             </a:extLst>
           </a:blip>
@@ -11212,10 +11210,10 @@
           <p:nvPr userDrawn="1"/>
         </p:nvPicPr>
         <p:blipFill>
-          <a:blip r:embed="rId22">
+          <a:blip>
             <a:extLst>
               <a:ext uri="{96DAC541-7B7A-43D3-8B79-37D633B846F1}">
-                <asvg:svgBlip xmlns:asvg="http://schemas.microsoft.com/office/drawing/2016/SVG/main" r:embed="rId23"/>
+                <asvg:svgBlip xmlns:asvg="http://schemas.microsoft.com/office/drawing/2016/SVG/main" r:embed="rId12"/>
               </a:ext>
             </a:extLst>
           </a:blip>
@@ -11248,10 +11246,10 @@
           <p:nvPr userDrawn="1"/>
         </p:nvPicPr>
         <p:blipFill>
-          <a:blip r:embed="rId24">
+          <a:blip>
             <a:extLst>
               <a:ext uri="{96DAC541-7B7A-43D3-8B79-37D633B846F1}">
-                <asvg:svgBlip xmlns:asvg="http://schemas.microsoft.com/office/drawing/2016/SVG/main" r:embed="rId25"/>
+                <asvg:svgBlip xmlns:asvg="http://schemas.microsoft.com/office/drawing/2016/SVG/main" r:embed="rId13"/>
               </a:ext>
             </a:extLst>
           </a:blip>
@@ -11284,10 +11282,10 @@
           <p:nvPr userDrawn="1"/>
         </p:nvPicPr>
         <p:blipFill>
-          <a:blip r:embed="rId26">
+          <a:blip>
             <a:extLst>
               <a:ext uri="{96DAC541-7B7A-43D3-8B79-37D633B846F1}">
-                <asvg:svgBlip xmlns:asvg="http://schemas.microsoft.com/office/drawing/2016/SVG/main" r:embed="rId27"/>
+                <asvg:svgBlip xmlns:asvg="http://schemas.microsoft.com/office/drawing/2016/SVG/main" r:embed="rId14"/>
               </a:ext>
             </a:extLst>
           </a:blip>
@@ -11320,10 +11318,10 @@
           <p:nvPr userDrawn="1"/>
         </p:nvPicPr>
         <p:blipFill>
-          <a:blip r:embed="rId28">
+          <a:blip>
             <a:extLst>
               <a:ext uri="{96DAC541-7B7A-43D3-8B79-37D633B846F1}">
-                <asvg:svgBlip xmlns:asvg="http://schemas.microsoft.com/office/drawing/2016/SVG/main" r:embed="rId29"/>
+                <asvg:svgBlip xmlns:asvg="http://schemas.microsoft.com/office/drawing/2016/SVG/main" r:embed="rId15"/>
               </a:ext>
             </a:extLst>
           </a:blip>
@@ -11356,10 +11354,10 @@
           <p:nvPr userDrawn="1"/>
         </p:nvPicPr>
         <p:blipFill>
-          <a:blip r:embed="rId30">
+          <a:blip>
             <a:extLst>
               <a:ext uri="{96DAC541-7B7A-43D3-8B79-37D633B846F1}">
-                <asvg:svgBlip xmlns:asvg="http://schemas.microsoft.com/office/drawing/2016/SVG/main" r:embed="rId31"/>
+                <asvg:svgBlip xmlns:asvg="http://schemas.microsoft.com/office/drawing/2016/SVG/main" r:embed="rId16"/>
               </a:ext>
             </a:extLst>
           </a:blip>
@@ -11392,10 +11390,10 @@
           <p:nvPr userDrawn="1"/>
         </p:nvPicPr>
         <p:blipFill>
-          <a:blip r:embed="rId32">
+          <a:blip>
             <a:extLst>
               <a:ext uri="{96DAC541-7B7A-43D3-8B79-37D633B846F1}">
-                <asvg:svgBlip xmlns:asvg="http://schemas.microsoft.com/office/drawing/2016/SVG/main" r:embed="rId33"/>
+                <asvg:svgBlip xmlns:asvg="http://schemas.microsoft.com/office/drawing/2016/SVG/main" r:embed="rId17"/>
               </a:ext>
             </a:extLst>
           </a:blip>
@@ -11428,10 +11426,10 @@
           <p:nvPr userDrawn="1"/>
         </p:nvPicPr>
         <p:blipFill>
-          <a:blip r:embed="rId34">
+          <a:blip>
             <a:extLst>
               <a:ext uri="{96DAC541-7B7A-43D3-8B79-37D633B846F1}">
-                <asvg:svgBlip xmlns:asvg="http://schemas.microsoft.com/office/drawing/2016/SVG/main" r:embed="rId35"/>
+                <asvg:svgBlip xmlns:asvg="http://schemas.microsoft.com/office/drawing/2016/SVG/main" r:embed="rId18"/>
               </a:ext>
             </a:extLst>
           </a:blip>
@@ -11464,10 +11462,10 @@
           <p:nvPr userDrawn="1"/>
         </p:nvPicPr>
         <p:blipFill>
-          <a:blip r:embed="rId36">
+          <a:blip>
             <a:extLst>
               <a:ext uri="{96DAC541-7B7A-43D3-8B79-37D633B846F1}">
-                <asvg:svgBlip xmlns:asvg="http://schemas.microsoft.com/office/drawing/2016/SVG/main" r:embed="rId37"/>
+                <asvg:svgBlip xmlns:asvg="http://schemas.microsoft.com/office/drawing/2016/SVG/main" r:embed="rId19"/>
               </a:ext>
             </a:extLst>
           </a:blip>
@@ -11500,10 +11498,10 @@
           <p:nvPr userDrawn="1"/>
         </p:nvPicPr>
         <p:blipFill>
-          <a:blip r:embed="rId38">
+          <a:blip>
             <a:extLst>
               <a:ext uri="{96DAC541-7B7A-43D3-8B79-37D633B846F1}">
-                <asvg:svgBlip xmlns:asvg="http://schemas.microsoft.com/office/drawing/2016/SVG/main" r:embed="rId39"/>
+                <asvg:svgBlip xmlns:asvg="http://schemas.microsoft.com/office/drawing/2016/SVG/main" r:embed="rId20"/>
               </a:ext>
             </a:extLst>
           </a:blip>
@@ -11536,10 +11534,10 @@
           <p:nvPr userDrawn="1"/>
         </p:nvPicPr>
         <p:blipFill>
-          <a:blip r:embed="rId40">
+          <a:blip>
             <a:extLst>
               <a:ext uri="{96DAC541-7B7A-43D3-8B79-37D633B846F1}">
-                <asvg:svgBlip xmlns:asvg="http://schemas.microsoft.com/office/drawing/2016/SVG/main" r:embed="rId41"/>
+                <asvg:svgBlip xmlns:asvg="http://schemas.microsoft.com/office/drawing/2016/SVG/main" r:embed="rId21"/>
               </a:ext>
             </a:extLst>
           </a:blip>
@@ -11572,10 +11570,10 @@
           <p:nvPr userDrawn="1"/>
         </p:nvPicPr>
         <p:blipFill>
-          <a:blip r:embed="rId42">
+          <a:blip>
             <a:extLst>
               <a:ext uri="{96DAC541-7B7A-43D3-8B79-37D633B846F1}">
-                <asvg:svgBlip xmlns:asvg="http://schemas.microsoft.com/office/drawing/2016/SVG/main" r:embed="rId43"/>
+                <asvg:svgBlip xmlns:asvg="http://schemas.microsoft.com/office/drawing/2016/SVG/main" r:embed="rId22"/>
               </a:ext>
             </a:extLst>
           </a:blip>
@@ -11608,10 +11606,10 @@
           <p:nvPr userDrawn="1"/>
         </p:nvPicPr>
         <p:blipFill>
-          <a:blip r:embed="rId4">
+          <a:blip>
             <a:extLst>
               <a:ext uri="{96DAC541-7B7A-43D3-8B79-37D633B846F1}">
-                <asvg:svgBlip xmlns:asvg="http://schemas.microsoft.com/office/drawing/2016/SVG/main" r:embed="rId5"/>
+                <asvg:svgBlip xmlns:asvg="http://schemas.microsoft.com/office/drawing/2016/SVG/main" r:embed="rId3"/>
               </a:ext>
             </a:extLst>
           </a:blip>
@@ -11644,10 +11642,10 @@
           <p:nvPr userDrawn="1"/>
         </p:nvPicPr>
         <p:blipFill>
-          <a:blip r:embed="rId44">
+          <a:blip>
             <a:extLst>
               <a:ext uri="{96DAC541-7B7A-43D3-8B79-37D633B846F1}">
-                <asvg:svgBlip xmlns:asvg="http://schemas.microsoft.com/office/drawing/2016/SVG/main" r:embed="rId45"/>
+                <asvg:svgBlip xmlns:asvg="http://schemas.microsoft.com/office/drawing/2016/SVG/main" r:embed="rId23"/>
               </a:ext>
             </a:extLst>
           </a:blip>
@@ -11680,10 +11678,10 @@
           <p:nvPr userDrawn="1"/>
         </p:nvPicPr>
         <p:blipFill>
-          <a:blip r:embed="rId46">
+          <a:blip>
             <a:extLst>
               <a:ext uri="{96DAC541-7B7A-43D3-8B79-37D633B846F1}">
-                <asvg:svgBlip xmlns:asvg="http://schemas.microsoft.com/office/drawing/2016/SVG/main" r:embed="rId47"/>
+                <asvg:svgBlip xmlns:asvg="http://schemas.microsoft.com/office/drawing/2016/SVG/main" r:embed="rId24"/>
               </a:ext>
             </a:extLst>
           </a:blip>
@@ -11716,10 +11714,10 @@
           <p:nvPr userDrawn="1"/>
         </p:nvPicPr>
         <p:blipFill>
-          <a:blip r:embed="rId48">
+          <a:blip>
             <a:extLst>
               <a:ext uri="{96DAC541-7B7A-43D3-8B79-37D633B846F1}">
-                <asvg:svgBlip xmlns:asvg="http://schemas.microsoft.com/office/drawing/2016/SVG/main" r:embed="rId49"/>
+                <asvg:svgBlip xmlns:asvg="http://schemas.microsoft.com/office/drawing/2016/SVG/main" r:embed="rId25"/>
               </a:ext>
             </a:extLst>
           </a:blip>
@@ -11752,10 +11750,10 @@
           <p:nvPr userDrawn="1"/>
         </p:nvPicPr>
         <p:blipFill>
-          <a:blip r:embed="rId50">
+          <a:blip>
             <a:extLst>
               <a:ext uri="{96DAC541-7B7A-43D3-8B79-37D633B846F1}">
-                <asvg:svgBlip xmlns:asvg="http://schemas.microsoft.com/office/drawing/2016/SVG/main" r:embed="rId51"/>
+                <asvg:svgBlip xmlns:asvg="http://schemas.microsoft.com/office/drawing/2016/SVG/main" r:embed="rId26"/>
               </a:ext>
             </a:extLst>
           </a:blip>
@@ -11788,10 +11786,10 @@
           <p:nvPr userDrawn="1"/>
         </p:nvPicPr>
         <p:blipFill>
-          <a:blip r:embed="rId52">
+          <a:blip>
             <a:extLst>
               <a:ext uri="{96DAC541-7B7A-43D3-8B79-37D633B846F1}">
-                <asvg:svgBlip xmlns:asvg="http://schemas.microsoft.com/office/drawing/2016/SVG/main" r:embed="rId53"/>
+                <asvg:svgBlip xmlns:asvg="http://schemas.microsoft.com/office/drawing/2016/SVG/main" r:embed="rId27"/>
               </a:ext>
             </a:extLst>
           </a:blip>
@@ -11824,10 +11822,10 @@
           <p:nvPr userDrawn="1"/>
         </p:nvPicPr>
         <p:blipFill>
-          <a:blip r:embed="rId54">
+          <a:blip>
             <a:extLst>
               <a:ext uri="{96DAC541-7B7A-43D3-8B79-37D633B846F1}">
-                <asvg:svgBlip xmlns:asvg="http://schemas.microsoft.com/office/drawing/2016/SVG/main" r:embed="rId55"/>
+                <asvg:svgBlip xmlns:asvg="http://schemas.microsoft.com/office/drawing/2016/SVG/main" r:embed="rId28"/>
               </a:ext>
             </a:extLst>
           </a:blip>
@@ -11860,10 +11858,10 @@
           <p:nvPr userDrawn="1"/>
         </p:nvPicPr>
         <p:blipFill>
-          <a:blip r:embed="rId56">
+          <a:blip>
             <a:extLst>
               <a:ext uri="{96DAC541-7B7A-43D3-8B79-37D633B846F1}">
-                <asvg:svgBlip xmlns:asvg="http://schemas.microsoft.com/office/drawing/2016/SVG/main" r:embed="rId57"/>
+                <asvg:svgBlip xmlns:asvg="http://schemas.microsoft.com/office/drawing/2016/SVG/main" r:embed="rId29"/>
               </a:ext>
             </a:extLst>
           </a:blip>
@@ -11896,10 +11894,10 @@
           <p:nvPr userDrawn="1"/>
         </p:nvPicPr>
         <p:blipFill>
-          <a:blip r:embed="rId58">
+          <a:blip>
             <a:extLst>
               <a:ext uri="{96DAC541-7B7A-43D3-8B79-37D633B846F1}">
-                <asvg:svgBlip xmlns:asvg="http://schemas.microsoft.com/office/drawing/2016/SVG/main" r:embed="rId59"/>
+                <asvg:svgBlip xmlns:asvg="http://schemas.microsoft.com/office/drawing/2016/SVG/main" r:embed="rId30"/>
               </a:ext>
             </a:extLst>
           </a:blip>
@@ -11932,10 +11930,10 @@
           <p:nvPr userDrawn="1"/>
         </p:nvPicPr>
         <p:blipFill>
-          <a:blip r:embed="rId60">
+          <a:blip>
             <a:extLst>
               <a:ext uri="{96DAC541-7B7A-43D3-8B79-37D633B846F1}">
-                <asvg:svgBlip xmlns:asvg="http://schemas.microsoft.com/office/drawing/2016/SVG/main" r:embed="rId61"/>
+                <asvg:svgBlip xmlns:asvg="http://schemas.microsoft.com/office/drawing/2016/SVG/main" r:embed="rId31"/>
               </a:ext>
             </a:extLst>
           </a:blip>
@@ -11968,10 +11966,10 @@
           <p:nvPr userDrawn="1"/>
         </p:nvPicPr>
         <p:blipFill>
-          <a:blip r:embed="rId62">
+          <a:blip>
             <a:extLst>
               <a:ext uri="{96DAC541-7B7A-43D3-8B79-37D633B846F1}">
-                <asvg:svgBlip xmlns:asvg="http://schemas.microsoft.com/office/drawing/2016/SVG/main" r:embed="rId63"/>
+                <asvg:svgBlip xmlns:asvg="http://schemas.microsoft.com/office/drawing/2016/SVG/main" r:embed="rId32"/>
               </a:ext>
             </a:extLst>
           </a:blip>
@@ -12004,10 +12002,10 @@
           <p:nvPr userDrawn="1"/>
         </p:nvPicPr>
         <p:blipFill>
-          <a:blip r:embed="rId64">
+          <a:blip>
             <a:extLst>
               <a:ext uri="{96DAC541-7B7A-43D3-8B79-37D633B846F1}">
-                <asvg:svgBlip xmlns:asvg="http://schemas.microsoft.com/office/drawing/2016/SVG/main" r:embed="rId65"/>
+                <asvg:svgBlip xmlns:asvg="http://schemas.microsoft.com/office/drawing/2016/SVG/main" r:embed="rId33"/>
               </a:ext>
             </a:extLst>
           </a:blip>
@@ -12040,10 +12038,10 @@
           <p:nvPr userDrawn="1"/>
         </p:nvPicPr>
         <p:blipFill>
-          <a:blip r:embed="rId66">
+          <a:blip>
             <a:extLst>
               <a:ext uri="{96DAC541-7B7A-43D3-8B79-37D633B846F1}">
-                <asvg:svgBlip xmlns:asvg="http://schemas.microsoft.com/office/drawing/2016/SVG/main" r:embed="rId67"/>
+                <asvg:svgBlip xmlns:asvg="http://schemas.microsoft.com/office/drawing/2016/SVG/main" r:embed="rId34"/>
               </a:ext>
             </a:extLst>
           </a:blip>
@@ -12076,10 +12074,10 @@
           <p:nvPr userDrawn="1"/>
         </p:nvPicPr>
         <p:blipFill>
-          <a:blip r:embed="rId68">
+          <a:blip>
             <a:extLst>
               <a:ext uri="{96DAC541-7B7A-43D3-8B79-37D633B846F1}">
-                <asvg:svgBlip xmlns:asvg="http://schemas.microsoft.com/office/drawing/2016/SVG/main" r:embed="rId69"/>
+                <asvg:svgBlip xmlns:asvg="http://schemas.microsoft.com/office/drawing/2016/SVG/main" r:embed="rId35"/>
               </a:ext>
             </a:extLst>
           </a:blip>
@@ -12112,10 +12110,10 @@
           <p:nvPr userDrawn="1"/>
         </p:nvPicPr>
         <p:blipFill>
-          <a:blip r:embed="rId70">
+          <a:blip>
             <a:extLst>
               <a:ext uri="{96DAC541-7B7A-43D3-8B79-37D633B846F1}">
-                <asvg:svgBlip xmlns:asvg="http://schemas.microsoft.com/office/drawing/2016/SVG/main" r:embed="rId71"/>
+                <asvg:svgBlip xmlns:asvg="http://schemas.microsoft.com/office/drawing/2016/SVG/main" r:embed="rId36"/>
               </a:ext>
             </a:extLst>
           </a:blip>
@@ -12148,10 +12146,10 @@
           <p:nvPr userDrawn="1"/>
         </p:nvPicPr>
         <p:blipFill>
-          <a:blip r:embed="rId72">
+          <a:blip>
             <a:extLst>
               <a:ext uri="{96DAC541-7B7A-43D3-8B79-37D633B846F1}">
-                <asvg:svgBlip xmlns:asvg="http://schemas.microsoft.com/office/drawing/2016/SVG/main" r:embed="rId73"/>
+                <asvg:svgBlip xmlns:asvg="http://schemas.microsoft.com/office/drawing/2016/SVG/main" r:embed="rId37"/>
               </a:ext>
             </a:extLst>
           </a:blip>
@@ -12184,10 +12182,10 @@
           <p:nvPr userDrawn="1"/>
         </p:nvPicPr>
         <p:blipFill>
-          <a:blip r:embed="rId74">
+          <a:blip>
             <a:extLst>
               <a:ext uri="{96DAC541-7B7A-43D3-8B79-37D633B846F1}">
-                <asvg:svgBlip xmlns:asvg="http://schemas.microsoft.com/office/drawing/2016/SVG/main" r:embed="rId75"/>
+                <asvg:svgBlip xmlns:asvg="http://schemas.microsoft.com/office/drawing/2016/SVG/main" r:embed="rId38"/>
               </a:ext>
             </a:extLst>
           </a:blip>
@@ -12220,10 +12218,10 @@
           <p:nvPr userDrawn="1"/>
         </p:nvPicPr>
         <p:blipFill>
-          <a:blip r:embed="rId76">
+          <a:blip>
             <a:extLst>
               <a:ext uri="{96DAC541-7B7A-43D3-8B79-37D633B846F1}">
-                <asvg:svgBlip xmlns:asvg="http://schemas.microsoft.com/office/drawing/2016/SVG/main" r:embed="rId77"/>
+                <asvg:svgBlip xmlns:asvg="http://schemas.microsoft.com/office/drawing/2016/SVG/main" r:embed="rId39"/>
               </a:ext>
             </a:extLst>
           </a:blip>
@@ -12256,10 +12254,10 @@
           <p:nvPr userDrawn="1"/>
         </p:nvPicPr>
         <p:blipFill>
-          <a:blip r:embed="rId78">
+          <a:blip>
             <a:extLst>
               <a:ext uri="{96DAC541-7B7A-43D3-8B79-37D633B846F1}">
-                <asvg:svgBlip xmlns:asvg="http://schemas.microsoft.com/office/drawing/2016/SVG/main" r:embed="rId79"/>
+                <asvg:svgBlip xmlns:asvg="http://schemas.microsoft.com/office/drawing/2016/SVG/main" r:embed="rId40"/>
               </a:ext>
             </a:extLst>
           </a:blip>
@@ -12495,7 +12493,7 @@
           <a:p>
             <a:fld id="{1D8BD707-D9CF-40AE-B4C6-C98DA3205C09}" type="datetimeFigureOut">
               <a:rPr lang="en-US"/>
-              <a:t>3/5/2026</a:t>
+              <a:t>5/15/2026</a:t>
             </a:fld>
             <a:endParaRPr lang="en-US" dirty="0"/>
           </a:p>
@@ -12602,10 +12600,10 @@
           <p:nvPr userDrawn="1"/>
         </p:nvPicPr>
         <p:blipFill>
-          <a:blip r:embed="rId2">
+          <a:blip>
             <a:extLst>
               <a:ext uri="{96DAC541-7B7A-43D3-8B79-37D633B846F1}">
-                <asvg:svgBlip xmlns:asvg="http://schemas.microsoft.com/office/drawing/2016/SVG/main" r:embed="rId3"/>
+                <asvg:svgBlip xmlns:asvg="http://schemas.microsoft.com/office/drawing/2016/SVG/main" r:embed="rId2"/>
               </a:ext>
             </a:extLst>
           </a:blip>
@@ -12638,10 +12636,10 @@
           <p:nvPr userDrawn="1"/>
         </p:nvPicPr>
         <p:blipFill>
-          <a:blip r:embed="rId4">
+          <a:blip>
             <a:extLst>
               <a:ext uri="{96DAC541-7B7A-43D3-8B79-37D633B846F1}">
-                <asvg:svgBlip xmlns:asvg="http://schemas.microsoft.com/office/drawing/2016/SVG/main" r:embed="rId5"/>
+                <asvg:svgBlip xmlns:asvg="http://schemas.microsoft.com/office/drawing/2016/SVG/main" r:embed="rId3"/>
               </a:ext>
             </a:extLst>
           </a:blip>
@@ -12674,10 +12672,10 @@
           <p:nvPr userDrawn="1"/>
         </p:nvPicPr>
         <p:blipFill>
-          <a:blip r:embed="rId6">
+          <a:blip>
             <a:extLst>
               <a:ext uri="{96DAC541-7B7A-43D3-8B79-37D633B846F1}">
-                <asvg:svgBlip xmlns:asvg="http://schemas.microsoft.com/office/drawing/2016/SVG/main" r:embed="rId7"/>
+                <asvg:svgBlip xmlns:asvg="http://schemas.microsoft.com/office/drawing/2016/SVG/main" r:embed="rId4"/>
               </a:ext>
             </a:extLst>
           </a:blip>
@@ -12710,10 +12708,10 @@
           <p:nvPr userDrawn="1"/>
         </p:nvPicPr>
         <p:blipFill>
-          <a:blip r:embed="rId8">
+          <a:blip>
             <a:extLst>
               <a:ext uri="{96DAC541-7B7A-43D3-8B79-37D633B846F1}">
-                <asvg:svgBlip xmlns:asvg="http://schemas.microsoft.com/office/drawing/2016/SVG/main" r:embed="rId9"/>
+                <asvg:svgBlip xmlns:asvg="http://schemas.microsoft.com/office/drawing/2016/SVG/main" r:embed="rId5"/>
               </a:ext>
             </a:extLst>
           </a:blip>
@@ -12746,10 +12744,10 @@
           <p:nvPr userDrawn="1"/>
         </p:nvPicPr>
         <p:blipFill>
-          <a:blip r:embed="rId10">
+          <a:blip>
             <a:extLst>
               <a:ext uri="{96DAC541-7B7A-43D3-8B79-37D633B846F1}">
-                <asvg:svgBlip xmlns:asvg="http://schemas.microsoft.com/office/drawing/2016/SVG/main" r:embed="rId11"/>
+                <asvg:svgBlip xmlns:asvg="http://schemas.microsoft.com/office/drawing/2016/SVG/main" r:embed="rId6"/>
               </a:ext>
             </a:extLst>
           </a:blip>
@@ -12782,10 +12780,10 @@
           <p:nvPr userDrawn="1"/>
         </p:nvPicPr>
         <p:blipFill>
-          <a:blip r:embed="rId12">
+          <a:blip>
             <a:extLst>
               <a:ext uri="{96DAC541-7B7A-43D3-8B79-37D633B846F1}">
-                <asvg:svgBlip xmlns:asvg="http://schemas.microsoft.com/office/drawing/2016/SVG/main" r:embed="rId13"/>
+                <asvg:svgBlip xmlns:asvg="http://schemas.microsoft.com/office/drawing/2016/SVG/main" r:embed="rId7"/>
               </a:ext>
             </a:extLst>
           </a:blip>
@@ -12818,10 +12816,10 @@
           <p:nvPr userDrawn="1"/>
         </p:nvPicPr>
         <p:blipFill>
-          <a:blip r:embed="rId14">
+          <a:blip>
             <a:extLst>
               <a:ext uri="{96DAC541-7B7A-43D3-8B79-37D633B846F1}">
-                <asvg:svgBlip xmlns:asvg="http://schemas.microsoft.com/office/drawing/2016/SVG/main" r:embed="rId15"/>
+                <asvg:svgBlip xmlns:asvg="http://schemas.microsoft.com/office/drawing/2016/SVG/main" r:embed="rId8"/>
               </a:ext>
             </a:extLst>
           </a:blip>
@@ -12854,10 +12852,10 @@
           <p:nvPr userDrawn="1"/>
         </p:nvPicPr>
         <p:blipFill>
-          <a:blip r:embed="rId16">
+          <a:blip>
             <a:extLst>
               <a:ext uri="{96DAC541-7B7A-43D3-8B79-37D633B846F1}">
-                <asvg:svgBlip xmlns:asvg="http://schemas.microsoft.com/office/drawing/2016/SVG/main" r:embed="rId17"/>
+                <asvg:svgBlip xmlns:asvg="http://schemas.microsoft.com/office/drawing/2016/SVG/main" r:embed="rId9"/>
               </a:ext>
             </a:extLst>
           </a:blip>
@@ -12890,10 +12888,10 @@
           <p:nvPr userDrawn="1"/>
         </p:nvPicPr>
         <p:blipFill>
-          <a:blip r:embed="rId18">
+          <a:blip>
             <a:extLst>
               <a:ext uri="{96DAC541-7B7A-43D3-8B79-37D633B846F1}">
-                <asvg:svgBlip xmlns:asvg="http://schemas.microsoft.com/office/drawing/2016/SVG/main" r:embed="rId19"/>
+                <asvg:svgBlip xmlns:asvg="http://schemas.microsoft.com/office/drawing/2016/SVG/main" r:embed="rId10"/>
               </a:ext>
             </a:extLst>
           </a:blip>
@@ -12926,10 +12924,10 @@
           <p:nvPr userDrawn="1"/>
         </p:nvPicPr>
         <p:blipFill>
-          <a:blip r:embed="rId20">
+          <a:blip>
             <a:extLst>
               <a:ext uri="{96DAC541-7B7A-43D3-8B79-37D633B846F1}">
-                <asvg:svgBlip xmlns:asvg="http://schemas.microsoft.com/office/drawing/2016/SVG/main" r:embed="rId21"/>
+                <asvg:svgBlip xmlns:asvg="http://schemas.microsoft.com/office/drawing/2016/SVG/main" r:embed="rId11"/>
               </a:ext>
             </a:extLst>
           </a:blip>
@@ -12962,10 +12960,10 @@
           <p:nvPr userDrawn="1"/>
         </p:nvPicPr>
         <p:blipFill>
-          <a:blip r:embed="rId22">
+          <a:blip>
             <a:extLst>
               <a:ext uri="{96DAC541-7B7A-43D3-8B79-37D633B846F1}">
-                <asvg:svgBlip xmlns:asvg="http://schemas.microsoft.com/office/drawing/2016/SVG/main" r:embed="rId23"/>
+                <asvg:svgBlip xmlns:asvg="http://schemas.microsoft.com/office/drawing/2016/SVG/main" r:embed="rId12"/>
               </a:ext>
             </a:extLst>
           </a:blip>
@@ -12998,10 +12996,10 @@
           <p:nvPr userDrawn="1"/>
         </p:nvPicPr>
         <p:blipFill>
-          <a:blip r:embed="rId24">
+          <a:blip>
             <a:extLst>
               <a:ext uri="{96DAC541-7B7A-43D3-8B79-37D633B846F1}">
-                <asvg:svgBlip xmlns:asvg="http://schemas.microsoft.com/office/drawing/2016/SVG/main" r:embed="rId25"/>
+                <asvg:svgBlip xmlns:asvg="http://schemas.microsoft.com/office/drawing/2016/SVG/main" r:embed="rId13"/>
               </a:ext>
             </a:extLst>
           </a:blip>
@@ -13034,10 +13032,10 @@
           <p:nvPr userDrawn="1"/>
         </p:nvPicPr>
         <p:blipFill>
-          <a:blip r:embed="rId26">
+          <a:blip>
             <a:extLst>
               <a:ext uri="{96DAC541-7B7A-43D3-8B79-37D633B846F1}">
-                <asvg:svgBlip xmlns:asvg="http://schemas.microsoft.com/office/drawing/2016/SVG/main" r:embed="rId27"/>
+                <asvg:svgBlip xmlns:asvg="http://schemas.microsoft.com/office/drawing/2016/SVG/main" r:embed="rId14"/>
               </a:ext>
             </a:extLst>
           </a:blip>
@@ -13070,10 +13068,10 @@
           <p:nvPr userDrawn="1"/>
         </p:nvPicPr>
         <p:blipFill>
-          <a:blip r:embed="rId28">
+          <a:blip>
             <a:extLst>
               <a:ext uri="{96DAC541-7B7A-43D3-8B79-37D633B846F1}">
-                <asvg:svgBlip xmlns:asvg="http://schemas.microsoft.com/office/drawing/2016/SVG/main" r:embed="rId29"/>
+                <asvg:svgBlip xmlns:asvg="http://schemas.microsoft.com/office/drawing/2016/SVG/main" r:embed="rId15"/>
               </a:ext>
             </a:extLst>
           </a:blip>
@@ -13106,10 +13104,10 @@
           <p:nvPr userDrawn="1"/>
         </p:nvPicPr>
         <p:blipFill>
-          <a:blip r:embed="rId30">
+          <a:blip>
             <a:extLst>
               <a:ext uri="{96DAC541-7B7A-43D3-8B79-37D633B846F1}">
-                <asvg:svgBlip xmlns:asvg="http://schemas.microsoft.com/office/drawing/2016/SVG/main" r:embed="rId31"/>
+                <asvg:svgBlip xmlns:asvg="http://schemas.microsoft.com/office/drawing/2016/SVG/main" r:embed="rId16"/>
               </a:ext>
             </a:extLst>
           </a:blip>
@@ -13142,10 +13140,10 @@
           <p:nvPr userDrawn="1"/>
         </p:nvPicPr>
         <p:blipFill>
-          <a:blip r:embed="rId32">
+          <a:blip>
             <a:extLst>
               <a:ext uri="{96DAC541-7B7A-43D3-8B79-37D633B846F1}">
-                <asvg:svgBlip xmlns:asvg="http://schemas.microsoft.com/office/drawing/2016/SVG/main" r:embed="rId33"/>
+                <asvg:svgBlip xmlns:asvg="http://schemas.microsoft.com/office/drawing/2016/SVG/main" r:embed="rId17"/>
               </a:ext>
             </a:extLst>
           </a:blip>
@@ -13178,10 +13176,10 @@
           <p:nvPr userDrawn="1"/>
         </p:nvPicPr>
         <p:blipFill>
-          <a:blip r:embed="rId34">
+          <a:blip>
             <a:extLst>
               <a:ext uri="{96DAC541-7B7A-43D3-8B79-37D633B846F1}">
-                <asvg:svgBlip xmlns:asvg="http://schemas.microsoft.com/office/drawing/2016/SVG/main" r:embed="rId35"/>
+                <asvg:svgBlip xmlns:asvg="http://schemas.microsoft.com/office/drawing/2016/SVG/main" r:embed="rId18"/>
               </a:ext>
             </a:extLst>
           </a:blip>
@@ -13214,10 +13212,10 @@
           <p:nvPr userDrawn="1"/>
         </p:nvPicPr>
         <p:blipFill>
-          <a:blip r:embed="rId36">
+          <a:blip>
             <a:extLst>
               <a:ext uri="{96DAC541-7B7A-43D3-8B79-37D633B846F1}">
-                <asvg:svgBlip xmlns:asvg="http://schemas.microsoft.com/office/drawing/2016/SVG/main" r:embed="rId37"/>
+                <asvg:svgBlip xmlns:asvg="http://schemas.microsoft.com/office/drawing/2016/SVG/main" r:embed="rId19"/>
               </a:ext>
             </a:extLst>
           </a:blip>
@@ -13250,10 +13248,10 @@
           <p:nvPr userDrawn="1"/>
         </p:nvPicPr>
         <p:blipFill>
-          <a:blip r:embed="rId38">
+          <a:blip>
             <a:extLst>
               <a:ext uri="{96DAC541-7B7A-43D3-8B79-37D633B846F1}">
-                <asvg:svgBlip xmlns:asvg="http://schemas.microsoft.com/office/drawing/2016/SVG/main" r:embed="rId39"/>
+                <asvg:svgBlip xmlns:asvg="http://schemas.microsoft.com/office/drawing/2016/SVG/main" r:embed="rId20"/>
               </a:ext>
             </a:extLst>
           </a:blip>
@@ -13286,10 +13284,10 @@
           <p:nvPr userDrawn="1"/>
         </p:nvPicPr>
         <p:blipFill>
-          <a:blip r:embed="rId40">
+          <a:blip>
             <a:extLst>
               <a:ext uri="{96DAC541-7B7A-43D3-8B79-37D633B846F1}">
-                <asvg:svgBlip xmlns:asvg="http://schemas.microsoft.com/office/drawing/2016/SVG/main" r:embed="rId41"/>
+                <asvg:svgBlip xmlns:asvg="http://schemas.microsoft.com/office/drawing/2016/SVG/main" r:embed="rId21"/>
               </a:ext>
             </a:extLst>
           </a:blip>
@@ -13322,10 +13320,10 @@
           <p:nvPr userDrawn="1"/>
         </p:nvPicPr>
         <p:blipFill>
-          <a:blip r:embed="rId42">
+          <a:blip>
             <a:extLst>
               <a:ext uri="{96DAC541-7B7A-43D3-8B79-37D633B846F1}">
-                <asvg:svgBlip xmlns:asvg="http://schemas.microsoft.com/office/drawing/2016/SVG/main" r:embed="rId43"/>
+                <asvg:svgBlip xmlns:asvg="http://schemas.microsoft.com/office/drawing/2016/SVG/main" r:embed="rId22"/>
               </a:ext>
             </a:extLst>
           </a:blip>
@@ -13358,10 +13356,10 @@
           <p:nvPr userDrawn="1"/>
         </p:nvPicPr>
         <p:blipFill>
-          <a:blip r:embed="rId44">
+          <a:blip>
             <a:extLst>
               <a:ext uri="{96DAC541-7B7A-43D3-8B79-37D633B846F1}">
-                <asvg:svgBlip xmlns:asvg="http://schemas.microsoft.com/office/drawing/2016/SVG/main" r:embed="rId45"/>
+                <asvg:svgBlip xmlns:asvg="http://schemas.microsoft.com/office/drawing/2016/SVG/main" r:embed="rId23"/>
               </a:ext>
             </a:extLst>
           </a:blip>
@@ -13394,10 +13392,10 @@
           <p:nvPr userDrawn="1"/>
         </p:nvPicPr>
         <p:blipFill>
-          <a:blip r:embed="rId46">
+          <a:blip>
             <a:extLst>
               <a:ext uri="{96DAC541-7B7A-43D3-8B79-37D633B846F1}">
-                <asvg:svgBlip xmlns:asvg="http://schemas.microsoft.com/office/drawing/2016/SVG/main" r:embed="rId47"/>
+                <asvg:svgBlip xmlns:asvg="http://schemas.microsoft.com/office/drawing/2016/SVG/main" r:embed="rId24"/>
               </a:ext>
             </a:extLst>
           </a:blip>
@@ -13430,10 +13428,10 @@
           <p:nvPr userDrawn="1"/>
         </p:nvPicPr>
         <p:blipFill>
-          <a:blip r:embed="rId48">
+          <a:blip>
             <a:extLst>
               <a:ext uri="{96DAC541-7B7A-43D3-8B79-37D633B846F1}">
-                <asvg:svgBlip xmlns:asvg="http://schemas.microsoft.com/office/drawing/2016/SVG/main" r:embed="rId49"/>
+                <asvg:svgBlip xmlns:asvg="http://schemas.microsoft.com/office/drawing/2016/SVG/main" r:embed="rId25"/>
               </a:ext>
             </a:extLst>
           </a:blip>
@@ -13466,10 +13464,10 @@
           <p:nvPr userDrawn="1"/>
         </p:nvPicPr>
         <p:blipFill>
-          <a:blip r:embed="rId50">
+          <a:blip>
             <a:extLst>
               <a:ext uri="{96DAC541-7B7A-43D3-8B79-37D633B846F1}">
-                <asvg:svgBlip xmlns:asvg="http://schemas.microsoft.com/office/drawing/2016/SVG/main" r:embed="rId51"/>
+                <asvg:svgBlip xmlns:asvg="http://schemas.microsoft.com/office/drawing/2016/SVG/main" r:embed="rId26"/>
               </a:ext>
             </a:extLst>
           </a:blip>
@@ -13502,10 +13500,10 @@
           <p:nvPr userDrawn="1"/>
         </p:nvPicPr>
         <p:blipFill>
-          <a:blip r:embed="rId52">
+          <a:blip>
             <a:extLst>
               <a:ext uri="{96DAC541-7B7A-43D3-8B79-37D633B846F1}">
-                <asvg:svgBlip xmlns:asvg="http://schemas.microsoft.com/office/drawing/2016/SVG/main" r:embed="rId53"/>
+                <asvg:svgBlip xmlns:asvg="http://schemas.microsoft.com/office/drawing/2016/SVG/main" r:embed="rId27"/>
               </a:ext>
             </a:extLst>
           </a:blip>
@@ -13538,10 +13536,10 @@
           <p:nvPr userDrawn="1"/>
         </p:nvPicPr>
         <p:blipFill>
-          <a:blip r:embed="rId54">
+          <a:blip>
             <a:extLst>
               <a:ext uri="{96DAC541-7B7A-43D3-8B79-37D633B846F1}">
-                <asvg:svgBlip xmlns:asvg="http://schemas.microsoft.com/office/drawing/2016/SVG/main" r:embed="rId55"/>
+                <asvg:svgBlip xmlns:asvg="http://schemas.microsoft.com/office/drawing/2016/SVG/main" r:embed="rId28"/>
               </a:ext>
             </a:extLst>
           </a:blip>
@@ -13574,10 +13572,10 @@
           <p:nvPr userDrawn="1"/>
         </p:nvPicPr>
         <p:blipFill>
-          <a:blip r:embed="rId56">
+          <a:blip>
             <a:extLst>
               <a:ext uri="{96DAC541-7B7A-43D3-8B79-37D633B846F1}">
-                <asvg:svgBlip xmlns:asvg="http://schemas.microsoft.com/office/drawing/2016/SVG/main" r:embed="rId57"/>
+                <asvg:svgBlip xmlns:asvg="http://schemas.microsoft.com/office/drawing/2016/SVG/main" r:embed="rId29"/>
               </a:ext>
             </a:extLst>
           </a:blip>
@@ -13610,10 +13608,10 @@
           <p:nvPr userDrawn="1"/>
         </p:nvPicPr>
         <p:blipFill>
-          <a:blip r:embed="rId58">
+          <a:blip>
             <a:extLst>
               <a:ext uri="{96DAC541-7B7A-43D3-8B79-37D633B846F1}">
-                <asvg:svgBlip xmlns:asvg="http://schemas.microsoft.com/office/drawing/2016/SVG/main" r:embed="rId59"/>
+                <asvg:svgBlip xmlns:asvg="http://schemas.microsoft.com/office/drawing/2016/SVG/main" r:embed="rId30"/>
               </a:ext>
             </a:extLst>
           </a:blip>
@@ -13646,10 +13644,10 @@
           <p:nvPr userDrawn="1"/>
         </p:nvPicPr>
         <p:blipFill>
-          <a:blip r:embed="rId60">
+          <a:blip>
             <a:extLst>
               <a:ext uri="{96DAC541-7B7A-43D3-8B79-37D633B846F1}">
-                <asvg:svgBlip xmlns:asvg="http://schemas.microsoft.com/office/drawing/2016/SVG/main" r:embed="rId61"/>
+                <asvg:svgBlip xmlns:asvg="http://schemas.microsoft.com/office/drawing/2016/SVG/main" r:embed="rId31"/>
               </a:ext>
             </a:extLst>
           </a:blip>
@@ -13682,10 +13680,10 @@
           <p:nvPr userDrawn="1"/>
         </p:nvPicPr>
         <p:blipFill>
-          <a:blip r:embed="rId62">
+          <a:blip>
             <a:extLst>
               <a:ext uri="{96DAC541-7B7A-43D3-8B79-37D633B846F1}">
-                <asvg:svgBlip xmlns:asvg="http://schemas.microsoft.com/office/drawing/2016/SVG/main" r:embed="rId63"/>
+                <asvg:svgBlip xmlns:asvg="http://schemas.microsoft.com/office/drawing/2016/SVG/main" r:embed="rId32"/>
               </a:ext>
             </a:extLst>
           </a:blip>
@@ -13921,7 +13919,7 @@
           <a:p>
             <a:fld id="{1D8BD707-D9CF-40AE-B4C6-C98DA3205C09}" type="datetimeFigureOut">
               <a:rPr lang="en-US"/>
-              <a:t>3/5/2026</a:t>
+              <a:t>5/15/2026</a:t>
             </a:fld>
             <a:endParaRPr lang="en-US" dirty="0"/>
           </a:p>
@@ -14028,10 +14026,10 @@
           <p:nvPr userDrawn="1"/>
         </p:nvPicPr>
         <p:blipFill>
-          <a:blip r:embed="rId2">
+          <a:blip>
             <a:extLst>
               <a:ext uri="{96DAC541-7B7A-43D3-8B79-37D633B846F1}">
-                <asvg:svgBlip xmlns:asvg="http://schemas.microsoft.com/office/drawing/2016/SVG/main" r:embed="rId3"/>
+                <asvg:svgBlip xmlns:asvg="http://schemas.microsoft.com/office/drawing/2016/SVG/main" r:embed="rId2"/>
               </a:ext>
             </a:extLst>
           </a:blip>
@@ -14064,10 +14062,10 @@
           <p:nvPr userDrawn="1"/>
         </p:nvPicPr>
         <p:blipFill>
-          <a:blip r:embed="rId4">
+          <a:blip>
             <a:extLst>
               <a:ext uri="{96DAC541-7B7A-43D3-8B79-37D633B846F1}">
-                <asvg:svgBlip xmlns:asvg="http://schemas.microsoft.com/office/drawing/2016/SVG/main" r:embed="rId5"/>
+                <asvg:svgBlip xmlns:asvg="http://schemas.microsoft.com/office/drawing/2016/SVG/main" r:embed="rId3"/>
               </a:ext>
             </a:extLst>
           </a:blip>
@@ -14100,10 +14098,10 @@
           <p:nvPr userDrawn="1"/>
         </p:nvPicPr>
         <p:blipFill>
-          <a:blip r:embed="rId6">
+          <a:blip>
             <a:extLst>
               <a:ext uri="{96DAC541-7B7A-43D3-8B79-37D633B846F1}">
-                <asvg:svgBlip xmlns:asvg="http://schemas.microsoft.com/office/drawing/2016/SVG/main" r:embed="rId7"/>
+                <asvg:svgBlip xmlns:asvg="http://schemas.microsoft.com/office/drawing/2016/SVG/main" r:embed="rId4"/>
               </a:ext>
             </a:extLst>
           </a:blip>
@@ -14136,10 +14134,10 @@
           <p:nvPr userDrawn="1"/>
         </p:nvPicPr>
         <p:blipFill>
-          <a:blip r:embed="rId8">
+          <a:blip>
             <a:extLst>
               <a:ext uri="{96DAC541-7B7A-43D3-8B79-37D633B846F1}">
-                <asvg:svgBlip xmlns:asvg="http://schemas.microsoft.com/office/drawing/2016/SVG/main" r:embed="rId9"/>
+                <asvg:svgBlip xmlns:asvg="http://schemas.microsoft.com/office/drawing/2016/SVG/main" r:embed="rId5"/>
               </a:ext>
             </a:extLst>
           </a:blip>
@@ -14172,10 +14170,10 @@
           <p:nvPr userDrawn="1"/>
         </p:nvPicPr>
         <p:blipFill>
-          <a:blip r:embed="rId10">
+          <a:blip>
             <a:extLst>
               <a:ext uri="{96DAC541-7B7A-43D3-8B79-37D633B846F1}">
-                <asvg:svgBlip xmlns:asvg="http://schemas.microsoft.com/office/drawing/2016/SVG/main" r:embed="rId11"/>
+                <asvg:svgBlip xmlns:asvg="http://schemas.microsoft.com/office/drawing/2016/SVG/main" r:embed="rId6"/>
               </a:ext>
             </a:extLst>
           </a:blip>
@@ -14208,10 +14206,10 @@
           <p:nvPr userDrawn="1"/>
         </p:nvPicPr>
         <p:blipFill>
-          <a:blip r:embed="rId12">
+          <a:blip>
             <a:extLst>
               <a:ext uri="{96DAC541-7B7A-43D3-8B79-37D633B846F1}">
-                <asvg:svgBlip xmlns:asvg="http://schemas.microsoft.com/office/drawing/2016/SVG/main" r:embed="rId13"/>
+                <asvg:svgBlip xmlns:asvg="http://schemas.microsoft.com/office/drawing/2016/SVG/main" r:embed="rId7"/>
               </a:ext>
             </a:extLst>
           </a:blip>
@@ -14244,10 +14242,10 @@
           <p:nvPr userDrawn="1"/>
         </p:nvPicPr>
         <p:blipFill>
-          <a:blip r:embed="rId14">
+          <a:blip>
             <a:extLst>
               <a:ext uri="{96DAC541-7B7A-43D3-8B79-37D633B846F1}">
-                <asvg:svgBlip xmlns:asvg="http://schemas.microsoft.com/office/drawing/2016/SVG/main" r:embed="rId15"/>
+                <asvg:svgBlip xmlns:asvg="http://schemas.microsoft.com/office/drawing/2016/SVG/main" r:embed="rId8"/>
               </a:ext>
             </a:extLst>
           </a:blip>
@@ -14280,10 +14278,10 @@
           <p:nvPr userDrawn="1"/>
         </p:nvPicPr>
         <p:blipFill>
-          <a:blip r:embed="rId16">
+          <a:blip>
             <a:extLst>
               <a:ext uri="{96DAC541-7B7A-43D3-8B79-37D633B846F1}">
-                <asvg:svgBlip xmlns:asvg="http://schemas.microsoft.com/office/drawing/2016/SVG/main" r:embed="rId17"/>
+                <asvg:svgBlip xmlns:asvg="http://schemas.microsoft.com/office/drawing/2016/SVG/main" r:embed="rId9"/>
               </a:ext>
             </a:extLst>
           </a:blip>
@@ -14316,10 +14314,10 @@
           <p:nvPr userDrawn="1"/>
         </p:nvPicPr>
         <p:blipFill>
-          <a:blip r:embed="rId18">
+          <a:blip>
             <a:extLst>
               <a:ext uri="{96DAC541-7B7A-43D3-8B79-37D633B846F1}">
-                <asvg:svgBlip xmlns:asvg="http://schemas.microsoft.com/office/drawing/2016/SVG/main" r:embed="rId19"/>
+                <asvg:svgBlip xmlns:asvg="http://schemas.microsoft.com/office/drawing/2016/SVG/main" r:embed="rId10"/>
               </a:ext>
             </a:extLst>
           </a:blip>
@@ -14352,10 +14350,10 @@
           <p:nvPr userDrawn="1"/>
         </p:nvPicPr>
         <p:blipFill>
-          <a:blip r:embed="rId20">
+          <a:blip>
             <a:extLst>
               <a:ext uri="{96DAC541-7B7A-43D3-8B79-37D633B846F1}">
-                <asvg:svgBlip xmlns:asvg="http://schemas.microsoft.com/office/drawing/2016/SVG/main" r:embed="rId21"/>
+                <asvg:svgBlip xmlns:asvg="http://schemas.microsoft.com/office/drawing/2016/SVG/main" r:embed="rId11"/>
               </a:ext>
             </a:extLst>
           </a:blip>
@@ -14388,10 +14386,10 @@
           <p:nvPr userDrawn="1"/>
         </p:nvPicPr>
         <p:blipFill>
-          <a:blip r:embed="rId22">
+          <a:blip>
             <a:extLst>
               <a:ext uri="{96DAC541-7B7A-43D3-8B79-37D633B846F1}">
-                <asvg:svgBlip xmlns:asvg="http://schemas.microsoft.com/office/drawing/2016/SVG/main" r:embed="rId23"/>
+                <asvg:svgBlip xmlns:asvg="http://schemas.microsoft.com/office/drawing/2016/SVG/main" r:embed="rId12"/>
               </a:ext>
             </a:extLst>
           </a:blip>
@@ -14424,10 +14422,10 @@
           <p:nvPr userDrawn="1"/>
         </p:nvPicPr>
         <p:blipFill>
-          <a:blip r:embed="rId24">
+          <a:blip>
             <a:extLst>
               <a:ext uri="{96DAC541-7B7A-43D3-8B79-37D633B846F1}">
-                <asvg:svgBlip xmlns:asvg="http://schemas.microsoft.com/office/drawing/2016/SVG/main" r:embed="rId25"/>
+                <asvg:svgBlip xmlns:asvg="http://schemas.microsoft.com/office/drawing/2016/SVG/main" r:embed="rId13"/>
               </a:ext>
             </a:extLst>
           </a:blip>
@@ -14460,10 +14458,10 @@
           <p:nvPr userDrawn="1"/>
         </p:nvPicPr>
         <p:blipFill>
-          <a:blip r:embed="rId26">
+          <a:blip>
             <a:extLst>
               <a:ext uri="{96DAC541-7B7A-43D3-8B79-37D633B846F1}">
-                <asvg:svgBlip xmlns:asvg="http://schemas.microsoft.com/office/drawing/2016/SVG/main" r:embed="rId27"/>
+                <asvg:svgBlip xmlns:asvg="http://schemas.microsoft.com/office/drawing/2016/SVG/main" r:embed="rId14"/>
               </a:ext>
             </a:extLst>
           </a:blip>
@@ -14496,10 +14494,10 @@
           <p:nvPr userDrawn="1"/>
         </p:nvPicPr>
         <p:blipFill>
-          <a:blip r:embed="rId28">
+          <a:blip>
             <a:extLst>
               <a:ext uri="{96DAC541-7B7A-43D3-8B79-37D633B846F1}">
-                <asvg:svgBlip xmlns:asvg="http://schemas.microsoft.com/office/drawing/2016/SVG/main" r:embed="rId29"/>
+                <asvg:svgBlip xmlns:asvg="http://schemas.microsoft.com/office/drawing/2016/SVG/main" r:embed="rId15"/>
               </a:ext>
             </a:extLst>
           </a:blip>
@@ -14532,10 +14530,10 @@
           <p:nvPr userDrawn="1"/>
         </p:nvPicPr>
         <p:blipFill>
-          <a:blip r:embed="rId30">
+          <a:blip>
             <a:extLst>
               <a:ext uri="{96DAC541-7B7A-43D3-8B79-37D633B846F1}">
-                <asvg:svgBlip xmlns:asvg="http://schemas.microsoft.com/office/drawing/2016/SVG/main" r:embed="rId31"/>
+                <asvg:svgBlip xmlns:asvg="http://schemas.microsoft.com/office/drawing/2016/SVG/main" r:embed="rId16"/>
               </a:ext>
             </a:extLst>
           </a:blip>
@@ -14568,10 +14566,10 @@
           <p:nvPr userDrawn="1"/>
         </p:nvPicPr>
         <p:blipFill>
-          <a:blip r:embed="rId32">
+          <a:blip>
             <a:extLst>
               <a:ext uri="{96DAC541-7B7A-43D3-8B79-37D633B846F1}">
-                <asvg:svgBlip xmlns:asvg="http://schemas.microsoft.com/office/drawing/2016/SVG/main" r:embed="rId33"/>
+                <asvg:svgBlip xmlns:asvg="http://schemas.microsoft.com/office/drawing/2016/SVG/main" r:embed="rId17"/>
               </a:ext>
             </a:extLst>
           </a:blip>
@@ -14604,10 +14602,10 @@
           <p:nvPr userDrawn="1"/>
         </p:nvPicPr>
         <p:blipFill>
-          <a:blip r:embed="rId34">
+          <a:blip>
             <a:extLst>
               <a:ext uri="{96DAC541-7B7A-43D3-8B79-37D633B846F1}">
-                <asvg:svgBlip xmlns:asvg="http://schemas.microsoft.com/office/drawing/2016/SVG/main" r:embed="rId35"/>
+                <asvg:svgBlip xmlns:asvg="http://schemas.microsoft.com/office/drawing/2016/SVG/main" r:embed="rId18"/>
               </a:ext>
             </a:extLst>
           </a:blip>
@@ -14640,10 +14638,10 @@
           <p:nvPr userDrawn="1"/>
         </p:nvPicPr>
         <p:blipFill>
-          <a:blip r:embed="rId36">
+          <a:blip>
             <a:extLst>
               <a:ext uri="{96DAC541-7B7A-43D3-8B79-37D633B846F1}">
-                <asvg:svgBlip xmlns:asvg="http://schemas.microsoft.com/office/drawing/2016/SVG/main" r:embed="rId37"/>
+                <asvg:svgBlip xmlns:asvg="http://schemas.microsoft.com/office/drawing/2016/SVG/main" r:embed="rId19"/>
               </a:ext>
             </a:extLst>
           </a:blip>
@@ -14676,10 +14674,10 @@
           <p:nvPr userDrawn="1"/>
         </p:nvPicPr>
         <p:blipFill>
-          <a:blip r:embed="rId38">
+          <a:blip>
             <a:extLst>
               <a:ext uri="{96DAC541-7B7A-43D3-8B79-37D633B846F1}">
-                <asvg:svgBlip xmlns:asvg="http://schemas.microsoft.com/office/drawing/2016/SVG/main" r:embed="rId39"/>
+                <asvg:svgBlip xmlns:asvg="http://schemas.microsoft.com/office/drawing/2016/SVG/main" r:embed="rId20"/>
               </a:ext>
             </a:extLst>
           </a:blip>
@@ -14712,10 +14710,10 @@
           <p:nvPr userDrawn="1"/>
         </p:nvPicPr>
         <p:blipFill>
-          <a:blip r:embed="rId40">
+          <a:blip>
             <a:extLst>
               <a:ext uri="{96DAC541-7B7A-43D3-8B79-37D633B846F1}">
-                <asvg:svgBlip xmlns:asvg="http://schemas.microsoft.com/office/drawing/2016/SVG/main" r:embed="rId41"/>
+                <asvg:svgBlip xmlns:asvg="http://schemas.microsoft.com/office/drawing/2016/SVG/main" r:embed="rId21"/>
               </a:ext>
             </a:extLst>
           </a:blip>
@@ -14748,10 +14746,10 @@
           <p:nvPr userDrawn="1"/>
         </p:nvPicPr>
         <p:blipFill>
-          <a:blip r:embed="rId42">
+          <a:blip>
             <a:extLst>
               <a:ext uri="{96DAC541-7B7A-43D3-8B79-37D633B846F1}">
-                <asvg:svgBlip xmlns:asvg="http://schemas.microsoft.com/office/drawing/2016/SVG/main" r:embed="rId43"/>
+                <asvg:svgBlip xmlns:asvg="http://schemas.microsoft.com/office/drawing/2016/SVG/main" r:embed="rId22"/>
               </a:ext>
             </a:extLst>
           </a:blip>
@@ -14784,10 +14782,10 @@
           <p:nvPr userDrawn="1"/>
         </p:nvPicPr>
         <p:blipFill>
-          <a:blip r:embed="rId44">
+          <a:blip>
             <a:extLst>
               <a:ext uri="{96DAC541-7B7A-43D3-8B79-37D633B846F1}">
-                <asvg:svgBlip xmlns:asvg="http://schemas.microsoft.com/office/drawing/2016/SVG/main" r:embed="rId45"/>
+                <asvg:svgBlip xmlns:asvg="http://schemas.microsoft.com/office/drawing/2016/SVG/main" r:embed="rId23"/>
               </a:ext>
             </a:extLst>
           </a:blip>
@@ -14820,10 +14818,10 @@
           <p:nvPr userDrawn="1"/>
         </p:nvPicPr>
         <p:blipFill>
-          <a:blip r:embed="rId46">
+          <a:blip>
             <a:extLst>
               <a:ext uri="{96DAC541-7B7A-43D3-8B79-37D633B846F1}">
-                <asvg:svgBlip xmlns:asvg="http://schemas.microsoft.com/office/drawing/2016/SVG/main" r:embed="rId47"/>
+                <asvg:svgBlip xmlns:asvg="http://schemas.microsoft.com/office/drawing/2016/SVG/main" r:embed="rId24"/>
               </a:ext>
             </a:extLst>
           </a:blip>
@@ -14856,10 +14854,10 @@
           <p:nvPr userDrawn="1"/>
         </p:nvPicPr>
         <p:blipFill>
-          <a:blip r:embed="rId48">
+          <a:blip>
             <a:extLst>
               <a:ext uri="{96DAC541-7B7A-43D3-8B79-37D633B846F1}">
-                <asvg:svgBlip xmlns:asvg="http://schemas.microsoft.com/office/drawing/2016/SVG/main" r:embed="rId49"/>
+                <asvg:svgBlip xmlns:asvg="http://schemas.microsoft.com/office/drawing/2016/SVG/main" r:embed="rId25"/>
               </a:ext>
             </a:extLst>
           </a:blip>
@@ -14892,10 +14890,10 @@
           <p:nvPr userDrawn="1"/>
         </p:nvPicPr>
         <p:blipFill>
-          <a:blip r:embed="rId50">
+          <a:blip>
             <a:extLst>
               <a:ext uri="{96DAC541-7B7A-43D3-8B79-37D633B846F1}">
-                <asvg:svgBlip xmlns:asvg="http://schemas.microsoft.com/office/drawing/2016/SVG/main" r:embed="rId51"/>
+                <asvg:svgBlip xmlns:asvg="http://schemas.microsoft.com/office/drawing/2016/SVG/main" r:embed="rId26"/>
               </a:ext>
             </a:extLst>
           </a:blip>
@@ -14928,10 +14926,10 @@
           <p:nvPr userDrawn="1"/>
         </p:nvPicPr>
         <p:blipFill>
-          <a:blip r:embed="rId52">
+          <a:blip>
             <a:extLst>
               <a:ext uri="{96DAC541-7B7A-43D3-8B79-37D633B846F1}">
-                <asvg:svgBlip xmlns:asvg="http://schemas.microsoft.com/office/drawing/2016/SVG/main" r:embed="rId53"/>
+                <asvg:svgBlip xmlns:asvg="http://schemas.microsoft.com/office/drawing/2016/SVG/main" r:embed="rId27"/>
               </a:ext>
             </a:extLst>
           </a:blip>
@@ -14964,10 +14962,10 @@
           <p:nvPr userDrawn="1"/>
         </p:nvPicPr>
         <p:blipFill>
-          <a:blip r:embed="rId54">
+          <a:blip>
             <a:extLst>
               <a:ext uri="{96DAC541-7B7A-43D3-8B79-37D633B846F1}">
-                <asvg:svgBlip xmlns:asvg="http://schemas.microsoft.com/office/drawing/2016/SVG/main" r:embed="rId55"/>
+                <asvg:svgBlip xmlns:asvg="http://schemas.microsoft.com/office/drawing/2016/SVG/main" r:embed="rId28"/>
               </a:ext>
             </a:extLst>
           </a:blip>
@@ -15000,10 +14998,10 @@
           <p:nvPr userDrawn="1"/>
         </p:nvPicPr>
         <p:blipFill>
-          <a:blip r:embed="rId56">
+          <a:blip>
             <a:extLst>
               <a:ext uri="{96DAC541-7B7A-43D3-8B79-37D633B846F1}">
-                <asvg:svgBlip xmlns:asvg="http://schemas.microsoft.com/office/drawing/2016/SVG/main" r:embed="rId57"/>
+                <asvg:svgBlip xmlns:asvg="http://schemas.microsoft.com/office/drawing/2016/SVG/main" r:embed="rId29"/>
               </a:ext>
             </a:extLst>
           </a:blip>
@@ -15036,10 +15034,10 @@
           <p:nvPr userDrawn="1"/>
         </p:nvPicPr>
         <p:blipFill>
-          <a:blip r:embed="rId58">
+          <a:blip>
             <a:extLst>
               <a:ext uri="{96DAC541-7B7A-43D3-8B79-37D633B846F1}">
-                <asvg:svgBlip xmlns:asvg="http://schemas.microsoft.com/office/drawing/2016/SVG/main" r:embed="rId59"/>
+                <asvg:svgBlip xmlns:asvg="http://schemas.microsoft.com/office/drawing/2016/SVG/main" r:embed="rId30"/>
               </a:ext>
             </a:extLst>
           </a:blip>
@@ -15072,10 +15070,10 @@
           <p:nvPr userDrawn="1"/>
         </p:nvPicPr>
         <p:blipFill>
-          <a:blip r:embed="rId60">
+          <a:blip>
             <a:extLst>
               <a:ext uri="{96DAC541-7B7A-43D3-8B79-37D633B846F1}">
-                <asvg:svgBlip xmlns:asvg="http://schemas.microsoft.com/office/drawing/2016/SVG/main" r:embed="rId61"/>
+                <asvg:svgBlip xmlns:asvg="http://schemas.microsoft.com/office/drawing/2016/SVG/main" r:embed="rId31"/>
               </a:ext>
             </a:extLst>
           </a:blip>
@@ -15108,10 +15106,10 @@
           <p:nvPr userDrawn="1"/>
         </p:nvPicPr>
         <p:blipFill>
-          <a:blip r:embed="rId62">
+          <a:blip>
             <a:extLst>
               <a:ext uri="{96DAC541-7B7A-43D3-8B79-37D633B846F1}">
-                <asvg:svgBlip xmlns:asvg="http://schemas.microsoft.com/office/drawing/2016/SVG/main" r:embed="rId63"/>
+                <asvg:svgBlip xmlns:asvg="http://schemas.microsoft.com/office/drawing/2016/SVG/main" r:embed="rId32"/>
               </a:ext>
             </a:extLst>
           </a:blip>
@@ -15144,10 +15142,10 @@
           <p:nvPr userDrawn="1"/>
         </p:nvPicPr>
         <p:blipFill>
-          <a:blip r:embed="rId64">
+          <a:blip>
             <a:extLst>
               <a:ext uri="{96DAC541-7B7A-43D3-8B79-37D633B846F1}">
-                <asvg:svgBlip xmlns:asvg="http://schemas.microsoft.com/office/drawing/2016/SVG/main" r:embed="rId65"/>
+                <asvg:svgBlip xmlns:asvg="http://schemas.microsoft.com/office/drawing/2016/SVG/main" r:embed="rId33"/>
               </a:ext>
             </a:extLst>
           </a:blip>
@@ -15180,10 +15178,10 @@
           <p:nvPr userDrawn="1"/>
         </p:nvPicPr>
         <p:blipFill>
-          <a:blip r:embed="rId66">
+          <a:blip>
             <a:extLst>
               <a:ext uri="{96DAC541-7B7A-43D3-8B79-37D633B846F1}">
-                <asvg:svgBlip xmlns:asvg="http://schemas.microsoft.com/office/drawing/2016/SVG/main" r:embed="rId67"/>
+                <asvg:svgBlip xmlns:asvg="http://schemas.microsoft.com/office/drawing/2016/SVG/main" r:embed="rId34"/>
               </a:ext>
             </a:extLst>
           </a:blip>
@@ -15216,10 +15214,10 @@
           <p:nvPr userDrawn="1"/>
         </p:nvPicPr>
         <p:blipFill>
-          <a:blip r:embed="rId68">
+          <a:blip>
             <a:extLst>
               <a:ext uri="{96DAC541-7B7A-43D3-8B79-37D633B846F1}">
-                <asvg:svgBlip xmlns:asvg="http://schemas.microsoft.com/office/drawing/2016/SVG/main" r:embed="rId69"/>
+                <asvg:svgBlip xmlns:asvg="http://schemas.microsoft.com/office/drawing/2016/SVG/main" r:embed="rId35"/>
               </a:ext>
             </a:extLst>
           </a:blip>
@@ -15252,10 +15250,10 @@
           <p:nvPr userDrawn="1"/>
         </p:nvPicPr>
         <p:blipFill>
-          <a:blip r:embed="rId70">
+          <a:blip>
             <a:extLst>
               <a:ext uri="{96DAC541-7B7A-43D3-8B79-37D633B846F1}">
-                <asvg:svgBlip xmlns:asvg="http://schemas.microsoft.com/office/drawing/2016/SVG/main" r:embed="rId71"/>
+                <asvg:svgBlip xmlns:asvg="http://schemas.microsoft.com/office/drawing/2016/SVG/main" r:embed="rId36"/>
               </a:ext>
             </a:extLst>
           </a:blip>
@@ -15288,10 +15286,10 @@
           <p:nvPr userDrawn="1"/>
         </p:nvPicPr>
         <p:blipFill>
-          <a:blip r:embed="rId72">
+          <a:blip>
             <a:extLst>
               <a:ext uri="{96DAC541-7B7A-43D3-8B79-37D633B846F1}">
-                <asvg:svgBlip xmlns:asvg="http://schemas.microsoft.com/office/drawing/2016/SVG/main" r:embed="rId73"/>
+                <asvg:svgBlip xmlns:asvg="http://schemas.microsoft.com/office/drawing/2016/SVG/main" r:embed="rId37"/>
               </a:ext>
             </a:extLst>
           </a:blip>
@@ -15324,10 +15322,10 @@
           <p:nvPr userDrawn="1"/>
         </p:nvPicPr>
         <p:blipFill>
-          <a:blip r:embed="rId74">
+          <a:blip>
             <a:extLst>
               <a:ext uri="{96DAC541-7B7A-43D3-8B79-37D633B846F1}">
-                <asvg:svgBlip xmlns:asvg="http://schemas.microsoft.com/office/drawing/2016/SVG/main" r:embed="rId75"/>
+                <asvg:svgBlip xmlns:asvg="http://schemas.microsoft.com/office/drawing/2016/SVG/main" r:embed="rId38"/>
               </a:ext>
             </a:extLst>
           </a:blip>
@@ -15360,10 +15358,10 @@
           <p:nvPr userDrawn="1"/>
         </p:nvPicPr>
         <p:blipFill>
-          <a:blip r:embed="rId76">
+          <a:blip>
             <a:extLst>
               <a:ext uri="{96DAC541-7B7A-43D3-8B79-37D633B846F1}">
-                <asvg:svgBlip xmlns:asvg="http://schemas.microsoft.com/office/drawing/2016/SVG/main" r:embed="rId77"/>
+                <asvg:svgBlip xmlns:asvg="http://schemas.microsoft.com/office/drawing/2016/SVG/main" r:embed="rId39"/>
               </a:ext>
             </a:extLst>
           </a:blip>
@@ -15396,10 +15394,10 @@
           <p:nvPr userDrawn="1"/>
         </p:nvPicPr>
         <p:blipFill>
-          <a:blip r:embed="rId78">
+          <a:blip>
             <a:extLst>
               <a:ext uri="{96DAC541-7B7A-43D3-8B79-37D633B846F1}">
-                <asvg:svgBlip xmlns:asvg="http://schemas.microsoft.com/office/drawing/2016/SVG/main" r:embed="rId79"/>
+                <asvg:svgBlip xmlns:asvg="http://schemas.microsoft.com/office/drawing/2016/SVG/main" r:embed="rId40"/>
               </a:ext>
             </a:extLst>
           </a:blip>
@@ -15432,10 +15430,10 @@
           <p:nvPr userDrawn="1"/>
         </p:nvPicPr>
         <p:blipFill>
-          <a:blip r:embed="rId80">
+          <a:blip>
             <a:extLst>
               <a:ext uri="{96DAC541-7B7A-43D3-8B79-37D633B846F1}">
-                <asvg:svgBlip xmlns:asvg="http://schemas.microsoft.com/office/drawing/2016/SVG/main" r:embed="rId81"/>
+                <asvg:svgBlip xmlns:asvg="http://schemas.microsoft.com/office/drawing/2016/SVG/main" r:embed="rId41"/>
               </a:ext>
             </a:extLst>
           </a:blip>
@@ -15468,10 +15466,10 @@
           <p:nvPr userDrawn="1"/>
         </p:nvPicPr>
         <p:blipFill>
-          <a:blip r:embed="rId82">
+          <a:blip>
             <a:extLst>
               <a:ext uri="{96DAC541-7B7A-43D3-8B79-37D633B846F1}">
-                <asvg:svgBlip xmlns:asvg="http://schemas.microsoft.com/office/drawing/2016/SVG/main" r:embed="rId83"/>
+                <asvg:svgBlip xmlns:asvg="http://schemas.microsoft.com/office/drawing/2016/SVG/main" r:embed="rId42"/>
               </a:ext>
             </a:extLst>
           </a:blip>
@@ -15504,10 +15502,10 @@
           <p:nvPr userDrawn="1"/>
         </p:nvPicPr>
         <p:blipFill>
-          <a:blip r:embed="rId84">
+          <a:blip>
             <a:extLst>
               <a:ext uri="{96DAC541-7B7A-43D3-8B79-37D633B846F1}">
-                <asvg:svgBlip xmlns:asvg="http://schemas.microsoft.com/office/drawing/2016/SVG/main" r:embed="rId85"/>
+                <asvg:svgBlip xmlns:asvg="http://schemas.microsoft.com/office/drawing/2016/SVG/main" r:embed="rId43"/>
               </a:ext>
             </a:extLst>
           </a:blip>
@@ -15540,10 +15538,10 @@
           <p:nvPr userDrawn="1"/>
         </p:nvPicPr>
         <p:blipFill>
-          <a:blip r:embed="rId86">
+          <a:blip>
             <a:extLst>
               <a:ext uri="{96DAC541-7B7A-43D3-8B79-37D633B846F1}">
-                <asvg:svgBlip xmlns:asvg="http://schemas.microsoft.com/office/drawing/2016/SVG/main" r:embed="rId87"/>
+                <asvg:svgBlip xmlns:asvg="http://schemas.microsoft.com/office/drawing/2016/SVG/main" r:embed="rId44"/>
               </a:ext>
             </a:extLst>
           </a:blip>
@@ -15576,10 +15574,10 @@
           <p:nvPr userDrawn="1"/>
         </p:nvPicPr>
         <p:blipFill>
-          <a:blip r:embed="rId88">
+          <a:blip>
             <a:extLst>
               <a:ext uri="{96DAC541-7B7A-43D3-8B79-37D633B846F1}">
-                <asvg:svgBlip xmlns:asvg="http://schemas.microsoft.com/office/drawing/2016/SVG/main" r:embed="rId89"/>
+                <asvg:svgBlip xmlns:asvg="http://schemas.microsoft.com/office/drawing/2016/SVG/main" r:embed="rId45"/>
               </a:ext>
             </a:extLst>
           </a:blip>
@@ -15612,10 +15610,10 @@
           <p:nvPr userDrawn="1"/>
         </p:nvPicPr>
         <p:blipFill>
-          <a:blip r:embed="rId90">
+          <a:blip>
             <a:extLst>
               <a:ext uri="{96DAC541-7B7A-43D3-8B79-37D633B846F1}">
-                <asvg:svgBlip xmlns:asvg="http://schemas.microsoft.com/office/drawing/2016/SVG/main" r:embed="rId91"/>
+                <asvg:svgBlip xmlns:asvg="http://schemas.microsoft.com/office/drawing/2016/SVG/main" r:embed="rId46"/>
               </a:ext>
             </a:extLst>
           </a:blip>
@@ -15648,10 +15646,10 @@
           <p:nvPr userDrawn="1"/>
         </p:nvPicPr>
         <p:blipFill>
-          <a:blip r:embed="rId92">
+          <a:blip>
             <a:extLst>
               <a:ext uri="{96DAC541-7B7A-43D3-8B79-37D633B846F1}">
-                <asvg:svgBlip xmlns:asvg="http://schemas.microsoft.com/office/drawing/2016/SVG/main" r:embed="rId93"/>
+                <asvg:svgBlip xmlns:asvg="http://schemas.microsoft.com/office/drawing/2016/SVG/main" r:embed="rId47"/>
               </a:ext>
             </a:extLst>
           </a:blip>
@@ -15684,10 +15682,10 @@
           <p:nvPr userDrawn="1"/>
         </p:nvPicPr>
         <p:blipFill>
-          <a:blip r:embed="rId94">
+          <a:blip>
             <a:extLst>
               <a:ext uri="{96DAC541-7B7A-43D3-8B79-37D633B846F1}">
-                <asvg:svgBlip xmlns:asvg="http://schemas.microsoft.com/office/drawing/2016/SVG/main" r:embed="rId95"/>
+                <asvg:svgBlip xmlns:asvg="http://schemas.microsoft.com/office/drawing/2016/SVG/main" r:embed="rId48"/>
               </a:ext>
             </a:extLst>
           </a:blip>
@@ -15720,10 +15718,10 @@
           <p:nvPr userDrawn="1"/>
         </p:nvPicPr>
         <p:blipFill>
-          <a:blip r:embed="rId96">
+          <a:blip>
             <a:extLst>
               <a:ext uri="{96DAC541-7B7A-43D3-8B79-37D633B846F1}">
-                <asvg:svgBlip xmlns:asvg="http://schemas.microsoft.com/office/drawing/2016/SVG/main" r:embed="rId97"/>
+                <asvg:svgBlip xmlns:asvg="http://schemas.microsoft.com/office/drawing/2016/SVG/main" r:embed="rId49"/>
               </a:ext>
             </a:extLst>
           </a:blip>
@@ -15756,10 +15754,10 @@
           <p:nvPr userDrawn="1"/>
         </p:nvPicPr>
         <p:blipFill>
-          <a:blip r:embed="rId98">
+          <a:blip>
             <a:extLst>
               <a:ext uri="{96DAC541-7B7A-43D3-8B79-37D633B846F1}">
-                <asvg:svgBlip xmlns:asvg="http://schemas.microsoft.com/office/drawing/2016/SVG/main" r:embed="rId99"/>
+                <asvg:svgBlip xmlns:asvg="http://schemas.microsoft.com/office/drawing/2016/SVG/main" r:embed="rId50"/>
               </a:ext>
             </a:extLst>
           </a:blip>
@@ -15792,10 +15790,10 @@
           <p:nvPr userDrawn="1"/>
         </p:nvPicPr>
         <p:blipFill>
-          <a:blip r:embed="rId100">
+          <a:blip>
             <a:extLst>
               <a:ext uri="{96DAC541-7B7A-43D3-8B79-37D633B846F1}">
-                <asvg:svgBlip xmlns:asvg="http://schemas.microsoft.com/office/drawing/2016/SVG/main" r:embed="rId101"/>
+                <asvg:svgBlip xmlns:asvg="http://schemas.microsoft.com/office/drawing/2016/SVG/main" r:embed="rId51"/>
               </a:ext>
             </a:extLst>
           </a:blip>
@@ -15828,10 +15826,10 @@
           <p:nvPr userDrawn="1"/>
         </p:nvPicPr>
         <p:blipFill>
-          <a:blip r:embed="rId102">
+          <a:blip>
             <a:extLst>
               <a:ext uri="{96DAC541-7B7A-43D3-8B79-37D633B846F1}">
-                <asvg:svgBlip xmlns:asvg="http://schemas.microsoft.com/office/drawing/2016/SVG/main" r:embed="rId103"/>
+                <asvg:svgBlip xmlns:asvg="http://schemas.microsoft.com/office/drawing/2016/SVG/main" r:embed="rId52"/>
               </a:ext>
             </a:extLst>
           </a:blip>
@@ -15864,10 +15862,10 @@
           <p:nvPr userDrawn="1"/>
         </p:nvPicPr>
         <p:blipFill>
-          <a:blip r:embed="rId104">
+          <a:blip>
             <a:extLst>
               <a:ext uri="{96DAC541-7B7A-43D3-8B79-37D633B846F1}">
-                <asvg:svgBlip xmlns:asvg="http://schemas.microsoft.com/office/drawing/2016/SVG/main" r:embed="rId105"/>
+                <asvg:svgBlip xmlns:asvg="http://schemas.microsoft.com/office/drawing/2016/SVG/main" r:embed="rId53"/>
               </a:ext>
             </a:extLst>
           </a:blip>
@@ -15900,10 +15898,10 @@
           <p:nvPr userDrawn="1"/>
         </p:nvPicPr>
         <p:blipFill>
-          <a:blip r:embed="rId106">
+          <a:blip>
             <a:extLst>
               <a:ext uri="{96DAC541-7B7A-43D3-8B79-37D633B846F1}">
-                <asvg:svgBlip xmlns:asvg="http://schemas.microsoft.com/office/drawing/2016/SVG/main" r:embed="rId107"/>
+                <asvg:svgBlip xmlns:asvg="http://schemas.microsoft.com/office/drawing/2016/SVG/main" r:embed="rId54"/>
               </a:ext>
             </a:extLst>
           </a:blip>
@@ -15936,10 +15934,10 @@
           <p:nvPr userDrawn="1"/>
         </p:nvPicPr>
         <p:blipFill>
-          <a:blip r:embed="rId108">
+          <a:blip>
             <a:extLst>
               <a:ext uri="{96DAC541-7B7A-43D3-8B79-37D633B846F1}">
-                <asvg:svgBlip xmlns:asvg="http://schemas.microsoft.com/office/drawing/2016/SVG/main" r:embed="rId109"/>
+                <asvg:svgBlip xmlns:asvg="http://schemas.microsoft.com/office/drawing/2016/SVG/main" r:embed="rId55"/>
               </a:ext>
             </a:extLst>
           </a:blip>
@@ -15972,10 +15970,10 @@
           <p:nvPr userDrawn="1"/>
         </p:nvPicPr>
         <p:blipFill>
-          <a:blip r:embed="rId110">
+          <a:blip>
             <a:extLst>
               <a:ext uri="{96DAC541-7B7A-43D3-8B79-37D633B846F1}">
-                <asvg:svgBlip xmlns:asvg="http://schemas.microsoft.com/office/drawing/2016/SVG/main" r:embed="rId111"/>
+                <asvg:svgBlip xmlns:asvg="http://schemas.microsoft.com/office/drawing/2016/SVG/main" r:embed="rId56"/>
               </a:ext>
             </a:extLst>
           </a:blip>
@@ -16008,10 +16006,10 @@
           <p:nvPr userDrawn="1"/>
         </p:nvPicPr>
         <p:blipFill>
-          <a:blip r:embed="rId112">
+          <a:blip>
             <a:extLst>
               <a:ext uri="{96DAC541-7B7A-43D3-8B79-37D633B846F1}">
-                <asvg:svgBlip xmlns:asvg="http://schemas.microsoft.com/office/drawing/2016/SVG/main" r:embed="rId113"/>
+                <asvg:svgBlip xmlns:asvg="http://schemas.microsoft.com/office/drawing/2016/SVG/main" r:embed="rId57"/>
               </a:ext>
             </a:extLst>
           </a:blip>
@@ -16044,10 +16042,10 @@
           <p:nvPr userDrawn="1"/>
         </p:nvPicPr>
         <p:blipFill>
-          <a:blip r:embed="rId114">
+          <a:blip>
             <a:extLst>
               <a:ext uri="{96DAC541-7B7A-43D3-8B79-37D633B846F1}">
-                <asvg:svgBlip xmlns:asvg="http://schemas.microsoft.com/office/drawing/2016/SVG/main" r:embed="rId115"/>
+                <asvg:svgBlip xmlns:asvg="http://schemas.microsoft.com/office/drawing/2016/SVG/main" r:embed="rId58"/>
               </a:ext>
             </a:extLst>
           </a:blip>
@@ -16080,10 +16078,10 @@
           <p:nvPr userDrawn="1"/>
         </p:nvPicPr>
         <p:blipFill>
-          <a:blip r:embed="rId116">
+          <a:blip>
             <a:extLst>
               <a:ext uri="{96DAC541-7B7A-43D3-8B79-37D633B846F1}">
-                <asvg:svgBlip xmlns:asvg="http://schemas.microsoft.com/office/drawing/2016/SVG/main" r:embed="rId117"/>
+                <asvg:svgBlip xmlns:asvg="http://schemas.microsoft.com/office/drawing/2016/SVG/main" r:embed="rId59"/>
               </a:ext>
             </a:extLst>
           </a:blip>
@@ -16116,10 +16114,10 @@
           <p:nvPr userDrawn="1"/>
         </p:nvPicPr>
         <p:blipFill>
-          <a:blip r:embed="rId118">
+          <a:blip>
             <a:extLst>
               <a:ext uri="{96DAC541-7B7A-43D3-8B79-37D633B846F1}">
-                <asvg:svgBlip xmlns:asvg="http://schemas.microsoft.com/office/drawing/2016/SVG/main" r:embed="rId119"/>
+                <asvg:svgBlip xmlns:asvg="http://schemas.microsoft.com/office/drawing/2016/SVG/main" r:embed="rId60"/>
               </a:ext>
             </a:extLst>
           </a:blip>
@@ -16152,10 +16150,10 @@
           <p:nvPr userDrawn="1"/>
         </p:nvPicPr>
         <p:blipFill>
-          <a:blip r:embed="rId82">
+          <a:blip>
             <a:extLst>
               <a:ext uri="{96DAC541-7B7A-43D3-8B79-37D633B846F1}">
-                <asvg:svgBlip xmlns:asvg="http://schemas.microsoft.com/office/drawing/2016/SVG/main" r:embed="rId83"/>
+                <asvg:svgBlip xmlns:asvg="http://schemas.microsoft.com/office/drawing/2016/SVG/main" r:embed="rId42"/>
               </a:ext>
             </a:extLst>
           </a:blip>
@@ -16391,7 +16389,7 @@
           <a:p>
             <a:fld id="{1D8BD707-D9CF-40AE-B4C6-C98DA3205C09}" type="datetimeFigureOut">
               <a:rPr lang="en-US"/>
-              <a:t>3/5/2026</a:t>
+              <a:t>5/15/2026</a:t>
             </a:fld>
             <a:endParaRPr lang="en-US" dirty="0"/>
           </a:p>
@@ -16498,10 +16496,10 @@
           <p:nvPr userDrawn="1"/>
         </p:nvPicPr>
         <p:blipFill>
-          <a:blip r:embed="rId2">
+          <a:blip>
             <a:extLst>
               <a:ext uri="{96DAC541-7B7A-43D3-8B79-37D633B846F1}">
-                <asvg:svgBlip xmlns:asvg="http://schemas.microsoft.com/office/drawing/2016/SVG/main" r:embed="rId3"/>
+                <asvg:svgBlip xmlns:asvg="http://schemas.microsoft.com/office/drawing/2016/SVG/main" r:embed="rId2"/>
               </a:ext>
             </a:extLst>
           </a:blip>
@@ -16534,10 +16532,10 @@
           <p:nvPr userDrawn="1"/>
         </p:nvPicPr>
         <p:blipFill>
-          <a:blip r:embed="rId4">
+          <a:blip>
             <a:extLst>
               <a:ext uri="{96DAC541-7B7A-43D3-8B79-37D633B846F1}">
-                <asvg:svgBlip xmlns:asvg="http://schemas.microsoft.com/office/drawing/2016/SVG/main" r:embed="rId5"/>
+                <asvg:svgBlip xmlns:asvg="http://schemas.microsoft.com/office/drawing/2016/SVG/main" r:embed="rId3"/>
               </a:ext>
             </a:extLst>
           </a:blip>
@@ -16570,10 +16568,10 @@
           <p:nvPr userDrawn="1"/>
         </p:nvPicPr>
         <p:blipFill>
-          <a:blip r:embed="rId6">
+          <a:blip>
             <a:extLst>
               <a:ext uri="{96DAC541-7B7A-43D3-8B79-37D633B846F1}">
-                <asvg:svgBlip xmlns:asvg="http://schemas.microsoft.com/office/drawing/2016/SVG/main" r:embed="rId7"/>
+                <asvg:svgBlip xmlns:asvg="http://schemas.microsoft.com/office/drawing/2016/SVG/main" r:embed="rId4"/>
               </a:ext>
             </a:extLst>
           </a:blip>
@@ -16606,10 +16604,10 @@
           <p:nvPr userDrawn="1"/>
         </p:nvPicPr>
         <p:blipFill>
-          <a:blip r:embed="rId8">
+          <a:blip>
             <a:extLst>
               <a:ext uri="{96DAC541-7B7A-43D3-8B79-37D633B846F1}">
-                <asvg:svgBlip xmlns:asvg="http://schemas.microsoft.com/office/drawing/2016/SVG/main" r:embed="rId9"/>
+                <asvg:svgBlip xmlns:asvg="http://schemas.microsoft.com/office/drawing/2016/SVG/main" r:embed="rId5"/>
               </a:ext>
             </a:extLst>
           </a:blip>
@@ -16642,10 +16640,10 @@
           <p:nvPr userDrawn="1"/>
         </p:nvPicPr>
         <p:blipFill>
-          <a:blip r:embed="rId10">
+          <a:blip>
             <a:extLst>
               <a:ext uri="{96DAC541-7B7A-43D3-8B79-37D633B846F1}">
-                <asvg:svgBlip xmlns:asvg="http://schemas.microsoft.com/office/drawing/2016/SVG/main" r:embed="rId11"/>
+                <asvg:svgBlip xmlns:asvg="http://schemas.microsoft.com/office/drawing/2016/SVG/main" r:embed="rId6"/>
               </a:ext>
             </a:extLst>
           </a:blip>
@@ -16678,10 +16676,10 @@
           <p:nvPr userDrawn="1"/>
         </p:nvPicPr>
         <p:blipFill>
-          <a:blip r:embed="rId12">
+          <a:blip>
             <a:extLst>
               <a:ext uri="{96DAC541-7B7A-43D3-8B79-37D633B846F1}">
-                <asvg:svgBlip xmlns:asvg="http://schemas.microsoft.com/office/drawing/2016/SVG/main" r:embed="rId13"/>
+                <asvg:svgBlip xmlns:asvg="http://schemas.microsoft.com/office/drawing/2016/SVG/main" r:embed="rId7"/>
               </a:ext>
             </a:extLst>
           </a:blip>
@@ -16714,10 +16712,10 @@
           <p:nvPr userDrawn="1"/>
         </p:nvPicPr>
         <p:blipFill>
-          <a:blip r:embed="rId14">
+          <a:blip>
             <a:extLst>
               <a:ext uri="{96DAC541-7B7A-43D3-8B79-37D633B846F1}">
-                <asvg:svgBlip xmlns:asvg="http://schemas.microsoft.com/office/drawing/2016/SVG/main" r:embed="rId15"/>
+                <asvg:svgBlip xmlns:asvg="http://schemas.microsoft.com/office/drawing/2016/SVG/main" r:embed="rId8"/>
               </a:ext>
             </a:extLst>
           </a:blip>
@@ -16750,10 +16748,10 @@
           <p:nvPr userDrawn="1"/>
         </p:nvPicPr>
         <p:blipFill>
-          <a:blip r:embed="rId16">
+          <a:blip>
             <a:extLst>
               <a:ext uri="{96DAC541-7B7A-43D3-8B79-37D633B846F1}">
-                <asvg:svgBlip xmlns:asvg="http://schemas.microsoft.com/office/drawing/2016/SVG/main" r:embed="rId17"/>
+                <asvg:svgBlip xmlns:asvg="http://schemas.microsoft.com/office/drawing/2016/SVG/main" r:embed="rId9"/>
               </a:ext>
             </a:extLst>
           </a:blip>
@@ -16786,10 +16784,10 @@
           <p:nvPr userDrawn="1"/>
         </p:nvPicPr>
         <p:blipFill>
-          <a:blip r:embed="rId18">
+          <a:blip>
             <a:extLst>
               <a:ext uri="{96DAC541-7B7A-43D3-8B79-37D633B846F1}">
-                <asvg:svgBlip xmlns:asvg="http://schemas.microsoft.com/office/drawing/2016/SVG/main" r:embed="rId19"/>
+                <asvg:svgBlip xmlns:asvg="http://schemas.microsoft.com/office/drawing/2016/SVG/main" r:embed="rId10"/>
               </a:ext>
             </a:extLst>
           </a:blip>
@@ -16822,10 +16820,10 @@
           <p:nvPr userDrawn="1"/>
         </p:nvPicPr>
         <p:blipFill>
-          <a:blip r:embed="rId20">
+          <a:blip>
             <a:extLst>
               <a:ext uri="{96DAC541-7B7A-43D3-8B79-37D633B846F1}">
-                <asvg:svgBlip xmlns:asvg="http://schemas.microsoft.com/office/drawing/2016/SVG/main" r:embed="rId21"/>
+                <asvg:svgBlip xmlns:asvg="http://schemas.microsoft.com/office/drawing/2016/SVG/main" r:embed="rId11"/>
               </a:ext>
             </a:extLst>
           </a:blip>
@@ -16858,10 +16856,10 @@
           <p:nvPr userDrawn="1"/>
         </p:nvPicPr>
         <p:blipFill>
-          <a:blip r:embed="rId22">
+          <a:blip>
             <a:extLst>
               <a:ext uri="{96DAC541-7B7A-43D3-8B79-37D633B846F1}">
-                <asvg:svgBlip xmlns:asvg="http://schemas.microsoft.com/office/drawing/2016/SVG/main" r:embed="rId23"/>
+                <asvg:svgBlip xmlns:asvg="http://schemas.microsoft.com/office/drawing/2016/SVG/main" r:embed="rId12"/>
               </a:ext>
             </a:extLst>
           </a:blip>
@@ -16894,10 +16892,10 @@
           <p:nvPr userDrawn="1"/>
         </p:nvPicPr>
         <p:blipFill>
-          <a:blip r:embed="rId24">
+          <a:blip>
             <a:extLst>
               <a:ext uri="{96DAC541-7B7A-43D3-8B79-37D633B846F1}">
-                <asvg:svgBlip xmlns:asvg="http://schemas.microsoft.com/office/drawing/2016/SVG/main" r:embed="rId25"/>
+                <asvg:svgBlip xmlns:asvg="http://schemas.microsoft.com/office/drawing/2016/SVG/main" r:embed="rId13"/>
               </a:ext>
             </a:extLst>
           </a:blip>
@@ -16930,10 +16928,10 @@
           <p:nvPr userDrawn="1"/>
         </p:nvPicPr>
         <p:blipFill>
-          <a:blip r:embed="rId26">
+          <a:blip>
             <a:extLst>
               <a:ext uri="{96DAC541-7B7A-43D3-8B79-37D633B846F1}">
-                <asvg:svgBlip xmlns:asvg="http://schemas.microsoft.com/office/drawing/2016/SVG/main" r:embed="rId27"/>
+                <asvg:svgBlip xmlns:asvg="http://schemas.microsoft.com/office/drawing/2016/SVG/main" r:embed="rId14"/>
               </a:ext>
             </a:extLst>
           </a:blip>
@@ -16966,10 +16964,10 @@
           <p:nvPr userDrawn="1"/>
         </p:nvPicPr>
         <p:blipFill>
-          <a:blip r:embed="rId28">
+          <a:blip>
             <a:extLst>
               <a:ext uri="{96DAC541-7B7A-43D3-8B79-37D633B846F1}">
-                <asvg:svgBlip xmlns:asvg="http://schemas.microsoft.com/office/drawing/2016/SVG/main" r:embed="rId29"/>
+                <asvg:svgBlip xmlns:asvg="http://schemas.microsoft.com/office/drawing/2016/SVG/main" r:embed="rId15"/>
               </a:ext>
             </a:extLst>
           </a:blip>
@@ -17002,10 +17000,10 @@
           <p:nvPr userDrawn="1"/>
         </p:nvPicPr>
         <p:blipFill>
-          <a:blip r:embed="rId30">
+          <a:blip>
             <a:extLst>
               <a:ext uri="{96DAC541-7B7A-43D3-8B79-37D633B846F1}">
-                <asvg:svgBlip xmlns:asvg="http://schemas.microsoft.com/office/drawing/2016/SVG/main" r:embed="rId31"/>
+                <asvg:svgBlip xmlns:asvg="http://schemas.microsoft.com/office/drawing/2016/SVG/main" r:embed="rId16"/>
               </a:ext>
             </a:extLst>
           </a:blip>
@@ -17038,10 +17036,10 @@
           <p:nvPr userDrawn="1"/>
         </p:nvPicPr>
         <p:blipFill>
-          <a:blip r:embed="rId32">
+          <a:blip>
             <a:extLst>
               <a:ext uri="{96DAC541-7B7A-43D3-8B79-37D633B846F1}">
-                <asvg:svgBlip xmlns:asvg="http://schemas.microsoft.com/office/drawing/2016/SVG/main" r:embed="rId33"/>
+                <asvg:svgBlip xmlns:asvg="http://schemas.microsoft.com/office/drawing/2016/SVG/main" r:embed="rId17"/>
               </a:ext>
             </a:extLst>
           </a:blip>
@@ -17074,10 +17072,10 @@
           <p:nvPr userDrawn="1"/>
         </p:nvPicPr>
         <p:blipFill>
-          <a:blip r:embed="rId34">
+          <a:blip>
             <a:extLst>
               <a:ext uri="{96DAC541-7B7A-43D3-8B79-37D633B846F1}">
-                <asvg:svgBlip xmlns:asvg="http://schemas.microsoft.com/office/drawing/2016/SVG/main" r:embed="rId35"/>
+                <asvg:svgBlip xmlns:asvg="http://schemas.microsoft.com/office/drawing/2016/SVG/main" r:embed="rId18"/>
               </a:ext>
             </a:extLst>
           </a:blip>
@@ -17110,10 +17108,10 @@
           <p:nvPr userDrawn="1"/>
         </p:nvPicPr>
         <p:blipFill>
-          <a:blip r:embed="rId36">
+          <a:blip>
             <a:extLst>
               <a:ext uri="{96DAC541-7B7A-43D3-8B79-37D633B846F1}">
-                <asvg:svgBlip xmlns:asvg="http://schemas.microsoft.com/office/drawing/2016/SVG/main" r:embed="rId37"/>
+                <asvg:svgBlip xmlns:asvg="http://schemas.microsoft.com/office/drawing/2016/SVG/main" r:embed="rId19"/>
               </a:ext>
             </a:extLst>
           </a:blip>
@@ -17146,10 +17144,10 @@
           <p:nvPr userDrawn="1"/>
         </p:nvPicPr>
         <p:blipFill>
-          <a:blip r:embed="rId38">
+          <a:blip>
             <a:extLst>
               <a:ext uri="{96DAC541-7B7A-43D3-8B79-37D633B846F1}">
-                <asvg:svgBlip xmlns:asvg="http://schemas.microsoft.com/office/drawing/2016/SVG/main" r:embed="rId39"/>
+                <asvg:svgBlip xmlns:asvg="http://schemas.microsoft.com/office/drawing/2016/SVG/main" r:embed="rId20"/>
               </a:ext>
             </a:extLst>
           </a:blip>
@@ -17182,10 +17180,10 @@
           <p:nvPr userDrawn="1"/>
         </p:nvPicPr>
         <p:blipFill>
-          <a:blip r:embed="rId40">
+          <a:blip>
             <a:extLst>
               <a:ext uri="{96DAC541-7B7A-43D3-8B79-37D633B846F1}">
-                <asvg:svgBlip xmlns:asvg="http://schemas.microsoft.com/office/drawing/2016/SVG/main" r:embed="rId41"/>
+                <asvg:svgBlip xmlns:asvg="http://schemas.microsoft.com/office/drawing/2016/SVG/main" r:embed="rId21"/>
               </a:ext>
             </a:extLst>
           </a:blip>
@@ -17218,10 +17216,10 @@
           <p:nvPr userDrawn="1"/>
         </p:nvPicPr>
         <p:blipFill>
-          <a:blip r:embed="rId42">
+          <a:blip>
             <a:extLst>
               <a:ext uri="{96DAC541-7B7A-43D3-8B79-37D633B846F1}">
-                <asvg:svgBlip xmlns:asvg="http://schemas.microsoft.com/office/drawing/2016/SVG/main" r:embed="rId43"/>
+                <asvg:svgBlip xmlns:asvg="http://schemas.microsoft.com/office/drawing/2016/SVG/main" r:embed="rId22"/>
               </a:ext>
             </a:extLst>
           </a:blip>
@@ -17254,10 +17252,10 @@
           <p:nvPr userDrawn="1"/>
         </p:nvPicPr>
         <p:blipFill>
-          <a:blip r:embed="rId44">
+          <a:blip>
             <a:extLst>
               <a:ext uri="{96DAC541-7B7A-43D3-8B79-37D633B846F1}">
-                <asvg:svgBlip xmlns:asvg="http://schemas.microsoft.com/office/drawing/2016/SVG/main" r:embed="rId45"/>
+                <asvg:svgBlip xmlns:asvg="http://schemas.microsoft.com/office/drawing/2016/SVG/main" r:embed="rId23"/>
               </a:ext>
             </a:extLst>
           </a:blip>
@@ -17290,10 +17288,10 @@
           <p:nvPr userDrawn="1"/>
         </p:nvPicPr>
         <p:blipFill>
-          <a:blip r:embed="rId46">
+          <a:blip>
             <a:extLst>
               <a:ext uri="{96DAC541-7B7A-43D3-8B79-37D633B846F1}">
-                <asvg:svgBlip xmlns:asvg="http://schemas.microsoft.com/office/drawing/2016/SVG/main" r:embed="rId47"/>
+                <asvg:svgBlip xmlns:asvg="http://schemas.microsoft.com/office/drawing/2016/SVG/main" r:embed="rId24"/>
               </a:ext>
             </a:extLst>
           </a:blip>
@@ -17326,10 +17324,10 @@
           <p:nvPr userDrawn="1"/>
         </p:nvPicPr>
         <p:blipFill>
-          <a:blip r:embed="rId48">
+          <a:blip>
             <a:extLst>
               <a:ext uri="{96DAC541-7B7A-43D3-8B79-37D633B846F1}">
-                <asvg:svgBlip xmlns:asvg="http://schemas.microsoft.com/office/drawing/2016/SVG/main" r:embed="rId49"/>
+                <asvg:svgBlip xmlns:asvg="http://schemas.microsoft.com/office/drawing/2016/SVG/main" r:embed="rId25"/>
               </a:ext>
             </a:extLst>
           </a:blip>
@@ -17362,10 +17360,10 @@
           <p:nvPr userDrawn="1"/>
         </p:nvPicPr>
         <p:blipFill>
-          <a:blip r:embed="rId50">
+          <a:blip>
             <a:extLst>
               <a:ext uri="{96DAC541-7B7A-43D3-8B79-37D633B846F1}">
-                <asvg:svgBlip xmlns:asvg="http://schemas.microsoft.com/office/drawing/2016/SVG/main" r:embed="rId51"/>
+                <asvg:svgBlip xmlns:asvg="http://schemas.microsoft.com/office/drawing/2016/SVG/main" r:embed="rId26"/>
               </a:ext>
             </a:extLst>
           </a:blip>
@@ -17398,10 +17396,10 @@
           <p:nvPr userDrawn="1"/>
         </p:nvPicPr>
         <p:blipFill>
-          <a:blip r:embed="rId52">
+          <a:blip>
             <a:extLst>
               <a:ext uri="{96DAC541-7B7A-43D3-8B79-37D633B846F1}">
-                <asvg:svgBlip xmlns:asvg="http://schemas.microsoft.com/office/drawing/2016/SVG/main" r:embed="rId53"/>
+                <asvg:svgBlip xmlns:asvg="http://schemas.microsoft.com/office/drawing/2016/SVG/main" r:embed="rId27"/>
               </a:ext>
             </a:extLst>
           </a:blip>
@@ -17434,10 +17432,10 @@
           <p:nvPr userDrawn="1"/>
         </p:nvPicPr>
         <p:blipFill>
-          <a:blip r:embed="rId54">
+          <a:blip>
             <a:extLst>
               <a:ext uri="{96DAC541-7B7A-43D3-8B79-37D633B846F1}">
-                <asvg:svgBlip xmlns:asvg="http://schemas.microsoft.com/office/drawing/2016/SVG/main" r:embed="rId55"/>
+                <asvg:svgBlip xmlns:asvg="http://schemas.microsoft.com/office/drawing/2016/SVG/main" r:embed="rId28"/>
               </a:ext>
             </a:extLst>
           </a:blip>
@@ -17470,10 +17468,10 @@
           <p:nvPr userDrawn="1"/>
         </p:nvPicPr>
         <p:blipFill>
-          <a:blip r:embed="rId56">
+          <a:blip>
             <a:extLst>
               <a:ext uri="{96DAC541-7B7A-43D3-8B79-37D633B846F1}">
-                <asvg:svgBlip xmlns:asvg="http://schemas.microsoft.com/office/drawing/2016/SVG/main" r:embed="rId57"/>
+                <asvg:svgBlip xmlns:asvg="http://schemas.microsoft.com/office/drawing/2016/SVG/main" r:embed="rId29"/>
               </a:ext>
             </a:extLst>
           </a:blip>
@@ -17506,10 +17504,10 @@
           <p:nvPr userDrawn="1"/>
         </p:nvPicPr>
         <p:blipFill>
-          <a:blip r:embed="rId58">
+          <a:blip>
             <a:extLst>
               <a:ext uri="{96DAC541-7B7A-43D3-8B79-37D633B846F1}">
-                <asvg:svgBlip xmlns:asvg="http://schemas.microsoft.com/office/drawing/2016/SVG/main" r:embed="rId59"/>
+                <asvg:svgBlip xmlns:asvg="http://schemas.microsoft.com/office/drawing/2016/SVG/main" r:embed="rId30"/>
               </a:ext>
             </a:extLst>
           </a:blip>
@@ -17542,10 +17540,10 @@
           <p:nvPr userDrawn="1"/>
         </p:nvPicPr>
         <p:blipFill>
-          <a:blip r:embed="rId60">
+          <a:blip>
             <a:extLst>
               <a:ext uri="{96DAC541-7B7A-43D3-8B79-37D633B846F1}">
-                <asvg:svgBlip xmlns:asvg="http://schemas.microsoft.com/office/drawing/2016/SVG/main" r:embed="rId61"/>
+                <asvg:svgBlip xmlns:asvg="http://schemas.microsoft.com/office/drawing/2016/SVG/main" r:embed="rId31"/>
               </a:ext>
             </a:extLst>
           </a:blip>
@@ -17578,10 +17576,10 @@
           <p:nvPr userDrawn="1"/>
         </p:nvPicPr>
         <p:blipFill>
-          <a:blip r:embed="rId62">
+          <a:blip>
             <a:extLst>
               <a:ext uri="{96DAC541-7B7A-43D3-8B79-37D633B846F1}">
-                <asvg:svgBlip xmlns:asvg="http://schemas.microsoft.com/office/drawing/2016/SVG/main" r:embed="rId63"/>
+                <asvg:svgBlip xmlns:asvg="http://schemas.microsoft.com/office/drawing/2016/SVG/main" r:embed="rId32"/>
               </a:ext>
             </a:extLst>
           </a:blip>
@@ -17614,10 +17612,10 @@
           <p:nvPr userDrawn="1"/>
         </p:nvPicPr>
         <p:blipFill>
-          <a:blip r:embed="rId64">
+          <a:blip>
             <a:extLst>
               <a:ext uri="{96DAC541-7B7A-43D3-8B79-37D633B846F1}">
-                <asvg:svgBlip xmlns:asvg="http://schemas.microsoft.com/office/drawing/2016/SVG/main" r:embed="rId65"/>
+                <asvg:svgBlip xmlns:asvg="http://schemas.microsoft.com/office/drawing/2016/SVG/main" r:embed="rId33"/>
               </a:ext>
             </a:extLst>
           </a:blip>
@@ -17650,10 +17648,10 @@
           <p:nvPr userDrawn="1"/>
         </p:nvPicPr>
         <p:blipFill>
-          <a:blip r:embed="rId66">
+          <a:blip>
             <a:extLst>
               <a:ext uri="{96DAC541-7B7A-43D3-8B79-37D633B846F1}">
-                <asvg:svgBlip xmlns:asvg="http://schemas.microsoft.com/office/drawing/2016/SVG/main" r:embed="rId67"/>
+                <asvg:svgBlip xmlns:asvg="http://schemas.microsoft.com/office/drawing/2016/SVG/main" r:embed="rId34"/>
               </a:ext>
             </a:extLst>
           </a:blip>
@@ -17686,10 +17684,10 @@
           <p:nvPr userDrawn="1"/>
         </p:nvPicPr>
         <p:blipFill>
-          <a:blip r:embed="rId68">
+          <a:blip>
             <a:extLst>
               <a:ext uri="{96DAC541-7B7A-43D3-8B79-37D633B846F1}">
-                <asvg:svgBlip xmlns:asvg="http://schemas.microsoft.com/office/drawing/2016/SVG/main" r:embed="rId69"/>
+                <asvg:svgBlip xmlns:asvg="http://schemas.microsoft.com/office/drawing/2016/SVG/main" r:embed="rId35"/>
               </a:ext>
             </a:extLst>
           </a:blip>
@@ -17722,10 +17720,10 @@
           <p:nvPr userDrawn="1"/>
         </p:nvPicPr>
         <p:blipFill>
-          <a:blip r:embed="rId70">
+          <a:blip>
             <a:extLst>
               <a:ext uri="{96DAC541-7B7A-43D3-8B79-37D633B846F1}">
-                <asvg:svgBlip xmlns:asvg="http://schemas.microsoft.com/office/drawing/2016/SVG/main" r:embed="rId71"/>
+                <asvg:svgBlip xmlns:asvg="http://schemas.microsoft.com/office/drawing/2016/SVG/main" r:embed="rId36"/>
               </a:ext>
             </a:extLst>
           </a:blip>
@@ -17758,10 +17756,10 @@
           <p:nvPr userDrawn="1"/>
         </p:nvPicPr>
         <p:blipFill>
-          <a:blip r:embed="rId72">
+          <a:blip>
             <a:extLst>
               <a:ext uri="{96DAC541-7B7A-43D3-8B79-37D633B846F1}">
-                <asvg:svgBlip xmlns:asvg="http://schemas.microsoft.com/office/drawing/2016/SVG/main" r:embed="rId73"/>
+                <asvg:svgBlip xmlns:asvg="http://schemas.microsoft.com/office/drawing/2016/SVG/main" r:embed="rId37"/>
               </a:ext>
             </a:extLst>
           </a:blip>
@@ -22209,7 +22207,7 @@
           <a:p>
             <a:fld id="{1D8BD707-D9CF-40AE-B4C6-C98DA3205C09}" type="datetimeFigureOut">
               <a:rPr lang="en-US"/>
-              <a:t>3/5/2026</a:t>
+              <a:t>5/15/2026</a:t>
             </a:fld>
             <a:endParaRPr lang="en-US" dirty="0"/>
           </a:p>
@@ -22631,7 +22629,7 @@
           <a:p>
             <a:fld id="{1D8BD707-D9CF-40AE-B4C6-C98DA3205C09}" type="datetimeFigureOut">
               <a:rPr lang="en-US"/>
-              <a:t>3/5/2026</a:t>
+              <a:t>5/15/2026</a:t>
             </a:fld>
             <a:endParaRPr lang="en-US" dirty="0"/>
           </a:p>
@@ -23024,7 +23022,7 @@
           <a:p>
             <a:fld id="{1D8BD707-D9CF-40AE-B4C6-C98DA3205C09}" type="datetimeFigureOut">
               <a:rPr lang="en-US"/>
-              <a:t>3/5/2026</a:t>
+              <a:t>5/15/2026</a:t>
             </a:fld>
             <a:endParaRPr lang="en-US" dirty="0"/>
           </a:p>
@@ -23542,7 +23540,7 @@
           <a:p>
             <a:fld id="{1D8BD707-D9CF-40AE-B4C6-C98DA3205C09}" type="datetimeFigureOut">
               <a:rPr lang="en-US"/>
-              <a:t>3/5/2026</a:t>
+              <a:t>5/15/2026</a:t>
             </a:fld>
             <a:endParaRPr lang="en-US" dirty="0"/>
           </a:p>
@@ -23912,7 +23910,7 @@
           <a:p>
             <a:fld id="{1D8BD707-D9CF-40AE-B4C6-C98DA3205C09}" type="datetimeFigureOut">
               <a:rPr lang="en-US"/>
-              <a:t>3/5/2026</a:t>
+              <a:t>5/15/2026</a:t>
             </a:fld>
             <a:endParaRPr lang="en-US" dirty="0"/>
           </a:p>
@@ -24089,7 +24087,7 @@
           <a:p>
             <a:fld id="{1D8BD707-D9CF-40AE-B4C6-C98DA3205C09}" type="datetimeFigureOut">
               <a:rPr lang="en-US"/>
-              <a:t>3/5/2026</a:t>
+              <a:t>5/15/2026</a:t>
             </a:fld>
             <a:endParaRPr lang="en-US" dirty="0"/>
           </a:p>
@@ -24332,7 +24330,7 @@
           <a:p>
             <a:fld id="{1D8BD707-D9CF-40AE-B4C6-C98DA3205C09}" type="datetimeFigureOut">
               <a:rPr lang="en-US"/>
-              <a:t>3/5/2026</a:t>
+              <a:t>5/15/2026</a:t>
             </a:fld>
             <a:endParaRPr lang="en-US" dirty="0"/>
           </a:p>
@@ -24496,7 +24494,7 @@
           <a:p>
             <a:fld id="{1D8BD707-D9CF-40AE-B4C6-C98DA3205C09}" type="datetimeFigureOut">
               <a:rPr lang="en-US"/>
-              <a:t>3/5/2026</a:t>
+              <a:t>5/15/2026</a:t>
             </a:fld>
             <a:endParaRPr lang="en-US"/>
           </a:p>
@@ -29298,15 +29296,15 @@
           <a:lstStyle/>
           <a:p>
             <a:r>
-              <a:rPr lang="de-AT" dirty="0" err="1"/>
-              <a:t>Dipolmarbeit</a:t>
+              <a:rPr lang="de-AT" dirty="0"/>
+              <a:t>Diplomarbeit</a:t>
             </a:r>
             <a:br>
               <a:rPr lang="de-AT" dirty="0"/>
             </a:br>
             <a:r>
               <a:rPr lang="de-AT" dirty="0"/>
-              <a:t>05.02.2026</a:t>
+              <a:t>22.05.2026</a:t>
             </a:r>
           </a:p>
         </p:txBody>
@@ -29446,463 +29444,6 @@
 </file>
 
 <file path=ppt/slides/slide10.xml><?xml version="1.0" encoding="utf-8"?>
-<p:sld xmlns:a="http://schemas.openxmlformats.org/drawingml/2006/main" xmlns:r="http://schemas.openxmlformats.org/officeDocument/2006/relationships" xmlns:p="http://schemas.openxmlformats.org/presentationml/2006/main">
-  <p:cSld>
-    <p:spTree>
-      <p:nvGrpSpPr>
-        <p:cNvPr id="1" name="">
-          <a:extLst>
-            <a:ext uri="{FF2B5EF4-FFF2-40B4-BE49-F238E27FC236}">
-              <a16:creationId xmlns:a16="http://schemas.microsoft.com/office/drawing/2014/main" id="{CC2E7DB2-F7B1-7BF1-0D7B-2941137A23A0}"/>
-            </a:ext>
-          </a:extLst>
-        </p:cNvPr>
-        <p:cNvGrpSpPr/>
-        <p:nvPr/>
-      </p:nvGrpSpPr>
-      <p:grpSpPr>
-        <a:xfrm>
-          <a:off x="0" y="0"/>
-          <a:ext cx="0" cy="0"/>
-          <a:chOff x="0" y="0"/>
-          <a:chExt cx="0" cy="0"/>
-        </a:xfrm>
-      </p:grpSpPr>
-      <p:sp>
-        <p:nvSpPr>
-          <p:cNvPr id="2" name="Textplatzhalter 1">
-            <a:extLst>
-              <a:ext uri="{FF2B5EF4-FFF2-40B4-BE49-F238E27FC236}">
-                <a16:creationId xmlns:a16="http://schemas.microsoft.com/office/drawing/2014/main" id="{4AFE4DCE-F842-74A0-C865-1527DF20CBD2}"/>
-              </a:ext>
-            </a:extLst>
-          </p:cNvPr>
-          <p:cNvSpPr>
-            <a:spLocks noGrp="1"/>
-          </p:cNvSpPr>
-          <p:nvPr>
-            <p:ph type="body" idx="1"/>
-          </p:nvPr>
-        </p:nvSpPr>
-        <p:spPr/>
-        <p:txBody>
-          <a:bodyPr/>
-          <a:lstStyle/>
-          <a:p>
-            <a:r>
-              <a:rPr lang="de-DE" b="1" dirty="0"/>
-              <a:t>Manuel</a:t>
-            </a:r>
-          </a:p>
-          <a:p>
-            <a:pPr marL="457200" indent="-457200">
-              <a:buFont typeface="Arial" panose="020B0604020202020204" pitchFamily="34" charset="0"/>
-              <a:buChar char="•"/>
-            </a:pPr>
-            <a:r>
-              <a:rPr lang="de-DE" sz="3200" dirty="0"/>
-              <a:t>Bildübertragung auf LED-Matrix</a:t>
-            </a:r>
-          </a:p>
-          <a:p>
-            <a:pPr marL="457200" indent="-457200">
-              <a:buFont typeface="Arial" panose="020B0604020202020204" pitchFamily="34" charset="0"/>
-              <a:buChar char="•"/>
-            </a:pPr>
-            <a:r>
-              <a:rPr lang="de-DE" sz="3200" dirty="0"/>
-              <a:t>Case und Platinen Designe </a:t>
-            </a:r>
-          </a:p>
-          <a:p>
-            <a:pPr marL="457200" indent="-457200">
-              <a:buFont typeface="Arial" panose="020B0604020202020204" pitchFamily="34" charset="0"/>
-              <a:buChar char="•"/>
-            </a:pPr>
-            <a:r>
-              <a:rPr lang="de-DE" sz="3200" dirty="0"/>
-              <a:t>Case Fertigung</a:t>
-            </a:r>
-          </a:p>
-          <a:p>
-            <a:pPr marL="457200" indent="-457200">
-              <a:buFont typeface="Arial" panose="020B0604020202020204" pitchFamily="34" charset="0"/>
-              <a:buChar char="•"/>
-            </a:pPr>
-            <a:r>
-              <a:rPr lang="de-DE" sz="3200" dirty="0"/>
-              <a:t>Dokumentation und </a:t>
-            </a:r>
-            <a:r>
-              <a:rPr lang="de-DE" sz="3200" dirty="0" err="1"/>
-              <a:t>Github</a:t>
-            </a:r>
-            <a:r>
-              <a:rPr lang="de-DE" sz="3200" dirty="0"/>
-              <a:t> Verwaltung</a:t>
-            </a:r>
-          </a:p>
-        </p:txBody>
-      </p:sp>
-      <p:sp>
-        <p:nvSpPr>
-          <p:cNvPr id="4" name="Titel 3">
-            <a:extLst>
-              <a:ext uri="{FF2B5EF4-FFF2-40B4-BE49-F238E27FC236}">
-                <a16:creationId xmlns:a16="http://schemas.microsoft.com/office/drawing/2014/main" id="{FB011655-2943-A858-7F43-18DC27D543EB}"/>
-              </a:ext>
-            </a:extLst>
-          </p:cNvPr>
-          <p:cNvSpPr>
-            <a:spLocks noGrp="1"/>
-          </p:cNvSpPr>
-          <p:nvPr>
-            <p:ph type="title"/>
-          </p:nvPr>
-        </p:nvSpPr>
-        <p:spPr/>
-        <p:txBody>
-          <a:bodyPr/>
-          <a:lstStyle/>
-          <a:p>
-            <a:r>
-              <a:rPr lang="de-DE" dirty="0"/>
-              <a:t>Manuel</a:t>
-            </a:r>
-          </a:p>
-        </p:txBody>
-      </p:sp>
-      <p:sp>
-        <p:nvSpPr>
-          <p:cNvPr id="6" name="Textplatzhalter 5">
-            <a:extLst>
-              <a:ext uri="{FF2B5EF4-FFF2-40B4-BE49-F238E27FC236}">
-                <a16:creationId xmlns:a16="http://schemas.microsoft.com/office/drawing/2014/main" id="{858E66CC-3F3B-A67C-89AB-B1B885F849F5}"/>
-              </a:ext>
-            </a:extLst>
-          </p:cNvPr>
-          <p:cNvSpPr>
-            <a:spLocks noGrp="1"/>
-          </p:cNvSpPr>
-          <p:nvPr>
-            <p:ph type="body" idx="10"/>
-          </p:nvPr>
-        </p:nvSpPr>
-        <p:spPr/>
-        <p:txBody>
-          <a:bodyPr/>
-          <a:lstStyle/>
-          <a:p>
-            <a:endParaRPr lang="de-AT" dirty="0"/>
-          </a:p>
-        </p:txBody>
-      </p:sp>
-    </p:spTree>
-    <p:extLst>
-      <p:ext uri="{BB962C8B-B14F-4D97-AF65-F5344CB8AC3E}">
-        <p14:creationId xmlns:p14="http://schemas.microsoft.com/office/powerpoint/2010/main" val="3230412208"/>
-      </p:ext>
-    </p:extLst>
-  </p:cSld>
-  <p:clrMapOvr>
-    <a:masterClrMapping/>
-  </p:clrMapOvr>
-</p:sld>
-</file>
-
-<file path=ppt/slides/slide11.xml><?xml version="1.0" encoding="utf-8"?>
-<p:sld xmlns:a="http://schemas.openxmlformats.org/drawingml/2006/main" xmlns:r="http://schemas.openxmlformats.org/officeDocument/2006/relationships" xmlns:p="http://schemas.openxmlformats.org/presentationml/2006/main">
-  <p:cSld>
-    <p:spTree>
-      <p:nvGrpSpPr>
-        <p:cNvPr id="1" name="">
-          <a:extLst>
-            <a:ext uri="{FF2B5EF4-FFF2-40B4-BE49-F238E27FC236}">
-              <a16:creationId xmlns:a16="http://schemas.microsoft.com/office/drawing/2014/main" id="{5EE128F7-77D5-E9C2-61C2-99E01B1FC181}"/>
-            </a:ext>
-          </a:extLst>
-        </p:cNvPr>
-        <p:cNvGrpSpPr/>
-        <p:nvPr/>
-      </p:nvGrpSpPr>
-      <p:grpSpPr>
-        <a:xfrm>
-          <a:off x="0" y="0"/>
-          <a:ext cx="0" cy="0"/>
-          <a:chOff x="0" y="0"/>
-          <a:chExt cx="0" cy="0"/>
-        </a:xfrm>
-      </p:grpSpPr>
-      <p:sp>
-        <p:nvSpPr>
-          <p:cNvPr id="3" name="Textplatzhalter 2">
-            <a:extLst>
-              <a:ext uri="{FF2B5EF4-FFF2-40B4-BE49-F238E27FC236}">
-                <a16:creationId xmlns:a16="http://schemas.microsoft.com/office/drawing/2014/main" id="{CBF53F7E-DC6C-0F13-47ED-C85CE327F3FB}"/>
-              </a:ext>
-            </a:extLst>
-          </p:cNvPr>
-          <p:cNvSpPr>
-            <a:spLocks noGrp="1"/>
-          </p:cNvSpPr>
-          <p:nvPr>
-            <p:ph type="body" idx="1"/>
-          </p:nvPr>
-        </p:nvSpPr>
-        <p:spPr>
-          <a:xfrm>
-            <a:off x="979488" y="2460923"/>
-            <a:ext cx="8771002" cy="7560840"/>
-          </a:xfrm>
-        </p:spPr>
-        <p:txBody>
-          <a:bodyPr>
-            <a:normAutofit/>
-          </a:bodyPr>
-          <a:lstStyle/>
-          <a:p>
-            <a:pPr>
-              <a:spcAft>
-                <a:spcPts val="600"/>
-              </a:spcAft>
-            </a:pPr>
-            <a:r>
-              <a:rPr lang="en-US" dirty="0"/>
-              <a:t>Main-Rework</a:t>
-            </a:r>
-          </a:p>
-          <a:p>
-            <a:pPr marL="457200" indent="-457200">
-              <a:spcAft>
-                <a:spcPts val="600"/>
-              </a:spcAft>
-              <a:buFont typeface="Arial" panose="020B0604020202020204" pitchFamily="34" charset="0"/>
-              <a:buChar char="•"/>
-            </a:pPr>
-            <a:r>
-              <a:rPr lang="en-US" dirty="0"/>
-              <a:t>Neuer </a:t>
-            </a:r>
-            <a:r>
-              <a:rPr lang="en-US" dirty="0" err="1"/>
-              <a:t>Übersichtlicher</a:t>
-            </a:r>
-            <a:r>
-              <a:rPr lang="en-US" dirty="0"/>
-              <a:t> Aufbau </a:t>
-            </a:r>
-          </a:p>
-          <a:p>
-            <a:pPr marL="914400" lvl="1" indent="-457200">
-              <a:spcAft>
-                <a:spcPts val="600"/>
-              </a:spcAft>
-              <a:buFont typeface="Arial" panose="020B0604020202020204" pitchFamily="34" charset="0"/>
-              <a:buChar char="•"/>
-            </a:pPr>
-            <a:r>
-              <a:rPr lang="en-US" dirty="0"/>
-              <a:t>Software </a:t>
-            </a:r>
-          </a:p>
-          <a:p>
-            <a:pPr marL="914400" lvl="1" indent="-457200">
-              <a:spcAft>
-                <a:spcPts val="600"/>
-              </a:spcAft>
-              <a:buFont typeface="Arial" panose="020B0604020202020204" pitchFamily="34" charset="0"/>
-              <a:buChar char="•"/>
-            </a:pPr>
-            <a:r>
-              <a:rPr lang="en-US" dirty="0"/>
-              <a:t>Simulation/</a:t>
-            </a:r>
-            <a:r>
-              <a:rPr lang="en-US" dirty="0" err="1"/>
-              <a:t>Dokumentation</a:t>
-            </a:r>
-            <a:endParaRPr lang="en-US" dirty="0"/>
-          </a:p>
-          <a:p>
-            <a:pPr marL="914400" lvl="1" indent="-457200">
-              <a:spcAft>
-                <a:spcPts val="600"/>
-              </a:spcAft>
-              <a:buFont typeface="Arial" panose="020B0604020202020204" pitchFamily="34" charset="0"/>
-              <a:buChar char="•"/>
-            </a:pPr>
-            <a:r>
-              <a:rPr lang="en-US" dirty="0"/>
-              <a:t>Setup </a:t>
-            </a:r>
-            <a:r>
-              <a:rPr lang="en-US" dirty="0" err="1"/>
-              <a:t>Guid</a:t>
-            </a:r>
-            <a:endParaRPr lang="en-US" dirty="0"/>
-          </a:p>
-          <a:p>
-            <a:pPr lvl="1">
-              <a:spcAft>
-                <a:spcPts val="600"/>
-              </a:spcAft>
-            </a:pPr>
-            <a:endParaRPr lang="en-US" dirty="0"/>
-          </a:p>
-          <a:p>
-            <a:pPr marL="457200" indent="-457200">
-              <a:spcAft>
-                <a:spcPts val="600"/>
-              </a:spcAft>
-              <a:buFont typeface="Arial" panose="020B0604020202020204" pitchFamily="34" charset="0"/>
-              <a:buChar char="•"/>
-            </a:pPr>
-            <a:r>
-              <a:rPr lang="en-US" dirty="0"/>
-              <a:t>READMEs mir </a:t>
-            </a:r>
-            <a:r>
-              <a:rPr lang="en-US" dirty="0" err="1"/>
-              <a:t>erklärungen</a:t>
-            </a:r>
-            <a:r>
-              <a:rPr lang="en-US" dirty="0"/>
-              <a:t> </a:t>
-            </a:r>
-          </a:p>
-          <a:p>
-            <a:pPr marL="457200" indent="-457200">
-              <a:spcAft>
-                <a:spcPts val="600"/>
-              </a:spcAft>
-              <a:buFont typeface="Arial" panose="020B0604020202020204" pitchFamily="34" charset="0"/>
-              <a:buChar char="•"/>
-            </a:pPr>
-            <a:endParaRPr lang="en-US" dirty="0"/>
-          </a:p>
-          <a:p>
-            <a:pPr marL="457200" indent="-457200">
-              <a:spcAft>
-                <a:spcPts val="600"/>
-              </a:spcAft>
-              <a:buFont typeface="Arial" panose="020B0604020202020204" pitchFamily="34" charset="0"/>
-              <a:buChar char="•"/>
-            </a:pPr>
-            <a:r>
-              <a:rPr lang="en-US" dirty="0"/>
-              <a:t>Code-Archive </a:t>
-            </a:r>
-          </a:p>
-          <a:p>
-            <a:pPr marL="457200" indent="-457200">
-              <a:spcAft>
-                <a:spcPts val="600"/>
-              </a:spcAft>
-              <a:buFont typeface="Arial" panose="020B0604020202020204" pitchFamily="34" charset="0"/>
-              <a:buChar char="•"/>
-            </a:pPr>
-            <a:endParaRPr lang="en-US" dirty="0"/>
-          </a:p>
-          <a:p>
-            <a:pPr>
-              <a:spcAft>
-                <a:spcPts val="600"/>
-              </a:spcAft>
-            </a:pPr>
-            <a:endParaRPr lang="de-AT" dirty="0"/>
-          </a:p>
-        </p:txBody>
-      </p:sp>
-      <p:sp>
-        <p:nvSpPr>
-          <p:cNvPr id="4" name="Titel 3">
-            <a:extLst>
-              <a:ext uri="{FF2B5EF4-FFF2-40B4-BE49-F238E27FC236}">
-                <a16:creationId xmlns:a16="http://schemas.microsoft.com/office/drawing/2014/main" id="{F4E0AC2E-E40F-B5EB-9EA1-6618B605182E}"/>
-              </a:ext>
-            </a:extLst>
-          </p:cNvPr>
-          <p:cNvSpPr>
-            <a:spLocks noGrp="1"/>
-          </p:cNvSpPr>
-          <p:nvPr>
-            <p:ph type="title"/>
-          </p:nvPr>
-        </p:nvSpPr>
-        <p:spPr>
-          <a:xfrm>
-            <a:off x="979488" y="588715"/>
-            <a:ext cx="12312922" cy="780637"/>
-          </a:xfrm>
-        </p:spPr>
-        <p:txBody>
-          <a:bodyPr>
-            <a:normAutofit/>
-          </a:bodyPr>
-          <a:lstStyle/>
-          <a:p>
-            <a:r>
-              <a:rPr lang="en-GB" dirty="0" err="1"/>
-              <a:t>Neustrukturiereung</a:t>
-            </a:r>
-            <a:r>
-              <a:rPr lang="en-GB" dirty="0"/>
-              <a:t> </a:t>
-            </a:r>
-            <a:r>
-              <a:rPr lang="en-GB" dirty="0" err="1"/>
-              <a:t>Github</a:t>
-            </a:r>
-            <a:endParaRPr lang="de-AT" dirty="0"/>
-          </a:p>
-        </p:txBody>
-      </p:sp>
-      <p:pic>
-        <p:nvPicPr>
-          <p:cNvPr id="8" name="Inhaltsplatzhalter 7">
-            <a:extLst>
-              <a:ext uri="{FF2B5EF4-FFF2-40B4-BE49-F238E27FC236}">
-                <a16:creationId xmlns:a16="http://schemas.microsoft.com/office/drawing/2014/main" id="{49D5B5DC-F66F-F669-39D5-8B91A478A543}"/>
-              </a:ext>
-            </a:extLst>
-          </p:cNvPr>
-          <p:cNvPicPr>
-            <a:picLocks noGrp="1" noChangeAspect="1"/>
-          </p:cNvPicPr>
-          <p:nvPr>
-            <p:ph sz="half" idx="3"/>
-          </p:nvPr>
-        </p:nvPicPr>
-        <p:blipFill>
-          <a:blip r:embed="rId2"/>
-          <a:stretch>
-            <a:fillRect/>
-          </a:stretch>
-        </p:blipFill>
-        <p:spPr>
-          <a:xfrm>
-            <a:off x="13292410" y="2148679"/>
-            <a:ext cx="4198596" cy="6961191"/>
-          </a:xfrm>
-          <a:prstGeom prst="rect">
-            <a:avLst/>
-          </a:prstGeom>
-        </p:spPr>
-      </p:pic>
-    </p:spTree>
-    <p:extLst>
-      <p:ext uri="{BB962C8B-B14F-4D97-AF65-F5344CB8AC3E}">
-        <p14:creationId xmlns:p14="http://schemas.microsoft.com/office/powerpoint/2010/main" val="1580370205"/>
-      </p:ext>
-    </p:extLst>
-  </p:cSld>
-  <p:clrMapOvr>
-    <a:masterClrMapping/>
-  </p:clrMapOvr>
-</p:sld>
-</file>
-
-<file path=ppt/slides/slide12.xml><?xml version="1.0" encoding="utf-8"?>
 <p:sld xmlns:a="http://schemas.openxmlformats.org/drawingml/2006/main" xmlns:r="http://schemas.openxmlformats.org/officeDocument/2006/relationships" xmlns:p="http://schemas.openxmlformats.org/presentationml/2006/main">
   <p:cSld>
     <p:spTree>
@@ -30222,7 +29763,7 @@
 </p:sld>
 </file>
 
-<file path=ppt/slides/slide13.xml><?xml version="1.0" encoding="utf-8"?>
+<file path=ppt/slides/slide11.xml><?xml version="1.0" encoding="utf-8"?>
 <p:sld xmlns:a="http://schemas.openxmlformats.org/drawingml/2006/main" xmlns:r="http://schemas.openxmlformats.org/officeDocument/2006/relationships" xmlns:p="http://schemas.openxmlformats.org/presentationml/2006/main">
   <p:cSld>
     <p:spTree>
@@ -30605,7 +30146,7 @@
 </p:sld>
 </file>
 
-<file path=ppt/slides/slide14.xml><?xml version="1.0" encoding="utf-8"?>
+<file path=ppt/slides/slide12.xml><?xml version="1.0" encoding="utf-8"?>
 <p:sld xmlns:a="http://schemas.openxmlformats.org/drawingml/2006/main" xmlns:r="http://schemas.openxmlformats.org/officeDocument/2006/relationships" xmlns:p="http://schemas.openxmlformats.org/presentationml/2006/main">
   <p:cSld>
     <p:spTree>
@@ -30861,7 +30402,7 @@
 </p:sld>
 </file>
 
-<file path=ppt/slides/slide15.xml><?xml version="1.0" encoding="utf-8"?>
+<file path=ppt/slides/slide13.xml><?xml version="1.0" encoding="utf-8"?>
 <p:sld xmlns:a="http://schemas.openxmlformats.org/drawingml/2006/main" xmlns:r="http://schemas.openxmlformats.org/officeDocument/2006/relationships" xmlns:p="http://schemas.openxmlformats.org/presentationml/2006/main">
   <p:cSld>
     <p:spTree>
@@ -31018,7 +30559,7 @@
 </p:sld>
 </file>
 
-<file path=ppt/slides/slide16.xml><?xml version="1.0" encoding="utf-8"?>
+<file path=ppt/slides/slide14.xml><?xml version="1.0" encoding="utf-8"?>
 <p:sld xmlns:a="http://schemas.openxmlformats.org/drawingml/2006/main" xmlns:r="http://schemas.openxmlformats.org/officeDocument/2006/relationships" xmlns:p="http://schemas.openxmlformats.org/presentationml/2006/main">
   <p:cSld>
     <p:spTree>
@@ -31236,7 +30777,7 @@
 </p:sld>
 </file>
 
-<file path=ppt/slides/slide17.xml><?xml version="1.0" encoding="utf-8"?>
+<file path=ppt/slides/slide15.xml><?xml version="1.0" encoding="utf-8"?>
 <p:sld xmlns:a="http://schemas.openxmlformats.org/drawingml/2006/main" xmlns:r="http://schemas.openxmlformats.org/officeDocument/2006/relationships" xmlns:p="http://schemas.openxmlformats.org/presentationml/2006/main">
   <p:cSld>
     <p:spTree>
@@ -31493,7 +31034,7 @@
 </p:sld>
 </file>
 
-<file path=ppt/slides/slide18.xml><?xml version="1.0" encoding="utf-8"?>
+<file path=ppt/slides/slide16.xml><?xml version="1.0" encoding="utf-8"?>
 <p:sld xmlns:a="http://schemas.openxmlformats.org/drawingml/2006/main" xmlns:r="http://schemas.openxmlformats.org/officeDocument/2006/relationships" xmlns:p="http://schemas.openxmlformats.org/presentationml/2006/main">
   <p:cSld>
     <p:spTree>
@@ -31659,7 +31200,7 @@
 </p:sld>
 </file>
 
-<file path=ppt/slides/slide19.xml><?xml version="1.0" encoding="utf-8"?>
+<file path=ppt/slides/slide17.xml><?xml version="1.0" encoding="utf-8"?>
 <p:sld xmlns:a="http://schemas.openxmlformats.org/drawingml/2006/main" xmlns:r="http://schemas.openxmlformats.org/officeDocument/2006/relationships" xmlns:p="http://schemas.openxmlformats.org/presentationml/2006/main">
   <p:cSld>
     <p:spTree>
@@ -31829,157 +31370,7 @@
 </p:sld>
 </file>
 
-<file path=ppt/slides/slide2.xml><?xml version="1.0" encoding="utf-8"?>
-<p:sld xmlns:a="http://schemas.openxmlformats.org/drawingml/2006/main" xmlns:r="http://schemas.openxmlformats.org/officeDocument/2006/relationships" xmlns:p="http://schemas.openxmlformats.org/presentationml/2006/main">
-  <p:cSld>
-    <p:spTree>
-      <p:nvGrpSpPr>
-        <p:cNvPr id="1" name=""/>
-        <p:cNvGrpSpPr/>
-        <p:nvPr/>
-      </p:nvGrpSpPr>
-      <p:grpSpPr>
-        <a:xfrm>
-          <a:off x="0" y="0"/>
-          <a:ext cx="0" cy="0"/>
-          <a:chOff x="0" y="0"/>
-          <a:chExt cx="0" cy="0"/>
-        </a:xfrm>
-      </p:grpSpPr>
-      <p:sp>
-        <p:nvSpPr>
-          <p:cNvPr id="2" name="Titel 1">
-            <a:extLst>
-              <a:ext uri="{FF2B5EF4-FFF2-40B4-BE49-F238E27FC236}">
-                <a16:creationId xmlns:a16="http://schemas.microsoft.com/office/drawing/2014/main" id="{D12326E1-3667-0341-3C58-553178F6BA69}"/>
-              </a:ext>
-            </a:extLst>
-          </p:cNvPr>
-          <p:cNvSpPr>
-            <a:spLocks noGrp="1"/>
-          </p:cNvSpPr>
-          <p:nvPr>
-            <p:ph type="title"/>
-          </p:nvPr>
-        </p:nvSpPr>
-        <p:spPr/>
-        <p:txBody>
-          <a:bodyPr/>
-          <a:lstStyle/>
-          <a:p>
-            <a:r>
-              <a:rPr lang="de-DE" dirty="0"/>
-              <a:t>Ziel</a:t>
-            </a:r>
-          </a:p>
-        </p:txBody>
-      </p:sp>
-      <p:sp>
-        <p:nvSpPr>
-          <p:cNvPr id="3" name="Textplatzhalter 2">
-            <a:extLst>
-              <a:ext uri="{FF2B5EF4-FFF2-40B4-BE49-F238E27FC236}">
-                <a16:creationId xmlns:a16="http://schemas.microsoft.com/office/drawing/2014/main" id="{0D01C0C1-C372-6CC5-66DB-46CDE14A4D4C}"/>
-              </a:ext>
-            </a:extLst>
-          </p:cNvPr>
-          <p:cNvSpPr>
-            <a:spLocks noGrp="1"/>
-          </p:cNvSpPr>
-          <p:nvPr>
-            <p:ph type="body" idx="1"/>
-          </p:nvPr>
-        </p:nvSpPr>
-        <p:spPr/>
-        <p:txBody>
-          <a:bodyPr/>
-          <a:lstStyle/>
-          <a:p>
-            <a:pPr marL="457200" indent="-457200">
-              <a:buFont typeface="Arial" panose="020B0604020202020204" pitchFamily="34" charset="0"/>
-              <a:buChar char="•"/>
-            </a:pPr>
-            <a:r>
-              <a:rPr lang="en-GB" dirty="0"/>
-              <a:t>Raspberry Pi Camera</a:t>
-            </a:r>
-          </a:p>
-          <a:p>
-            <a:pPr marL="457200" indent="-457200">
-              <a:buFont typeface="Arial" panose="020B0604020202020204" pitchFamily="34" charset="0"/>
-              <a:buChar char="•"/>
-            </a:pPr>
-            <a:r>
-              <a:rPr lang="de-AT" dirty="0"/>
-              <a:t>Silhouette erstellen</a:t>
-            </a:r>
-          </a:p>
-          <a:p>
-            <a:pPr marL="457200" indent="-457200">
-              <a:buFont typeface="Arial" panose="020B0604020202020204" pitchFamily="34" charset="0"/>
-              <a:buChar char="•"/>
-            </a:pPr>
-            <a:r>
-              <a:rPr lang="de-AT" dirty="0"/>
-              <a:t>Auf die LEDs Skalieren</a:t>
-            </a:r>
-          </a:p>
-          <a:p>
-            <a:pPr marL="457200" indent="-457200">
-              <a:buFont typeface="Arial" panose="020B0604020202020204" pitchFamily="34" charset="0"/>
-              <a:buChar char="•"/>
-            </a:pPr>
-            <a:r>
-              <a:rPr lang="de-AT" dirty="0"/>
-              <a:t>Anzeige</a:t>
-            </a:r>
-          </a:p>
-        </p:txBody>
-      </p:sp>
-      <p:pic>
-        <p:nvPicPr>
-          <p:cNvPr id="9" name="Grafik 8">
-            <a:extLst>
-              <a:ext uri="{FF2B5EF4-FFF2-40B4-BE49-F238E27FC236}">
-                <a16:creationId xmlns:a16="http://schemas.microsoft.com/office/drawing/2014/main" id="{84F44C3E-7BD9-55AC-A74E-B91BCBBCC616}"/>
-              </a:ext>
-            </a:extLst>
-          </p:cNvPr>
-          <p:cNvPicPr>
-            <a:picLocks noChangeAspect="1"/>
-          </p:cNvPicPr>
-          <p:nvPr/>
-        </p:nvPicPr>
-        <p:blipFill>
-          <a:blip r:embed="rId2"/>
-          <a:stretch>
-            <a:fillRect/>
-          </a:stretch>
-        </p:blipFill>
-        <p:spPr>
-          <a:xfrm>
-            <a:off x="619002" y="5650345"/>
-            <a:ext cx="18866096" cy="2732750"/>
-          </a:xfrm>
-          <a:prstGeom prst="rect">
-            <a:avLst/>
-          </a:prstGeom>
-        </p:spPr>
-      </p:pic>
-    </p:spTree>
-    <p:extLst>
-      <p:ext uri="{BB962C8B-B14F-4D97-AF65-F5344CB8AC3E}">
-        <p14:creationId xmlns:p14="http://schemas.microsoft.com/office/powerpoint/2010/main" val="2583020303"/>
-      </p:ext>
-    </p:extLst>
-  </p:cSld>
-  <p:clrMapOvr>
-    <a:masterClrMapping/>
-  </p:clrMapOvr>
-</p:sld>
-</file>
-
-<file path=ppt/slides/slide20.xml><?xml version="1.0" encoding="utf-8"?>
+<file path=ppt/slides/slide18.xml><?xml version="1.0" encoding="utf-8"?>
 <p:sld xmlns:a="http://schemas.openxmlformats.org/drawingml/2006/main" xmlns:r="http://schemas.openxmlformats.org/officeDocument/2006/relationships" xmlns:p="http://schemas.openxmlformats.org/presentationml/2006/main">
   <p:cSld>
     <p:spTree>
@@ -32133,7 +31524,7 @@
 </p:sld>
 </file>
 
-<file path=ppt/slides/slide21.xml><?xml version="1.0" encoding="utf-8"?>
+<file path=ppt/slides/slide19.xml><?xml version="1.0" encoding="utf-8"?>
 <p:sld xmlns:a="http://schemas.openxmlformats.org/drawingml/2006/main" xmlns:r="http://schemas.openxmlformats.org/officeDocument/2006/relationships" xmlns:p="http://schemas.openxmlformats.org/presentationml/2006/main">
   <p:cSld>
     <p:spTree>
@@ -32220,7 +31611,7 @@
 </p:sld>
 </file>
 
-<file path=ppt/slides/slide3.xml><?xml version="1.0" encoding="utf-8"?>
+<file path=ppt/slides/slide2.xml><?xml version="1.0" encoding="utf-8"?>
 <p:sld xmlns:a="http://schemas.openxmlformats.org/drawingml/2006/main" xmlns:r="http://schemas.openxmlformats.org/officeDocument/2006/relationships" xmlns:p="http://schemas.openxmlformats.org/presentationml/2006/main">
   <p:cSld>
     <p:spTree>
@@ -32242,7 +31633,7 @@
           <p:cNvPr id="2" name="Titel 1">
             <a:extLst>
               <a:ext uri="{FF2B5EF4-FFF2-40B4-BE49-F238E27FC236}">
-                <a16:creationId xmlns:a16="http://schemas.microsoft.com/office/drawing/2014/main" id="{900478CB-DC17-979A-9EB1-12BF53A3126E}"/>
+                <a16:creationId xmlns:a16="http://schemas.microsoft.com/office/drawing/2014/main" id="{D12326E1-3667-0341-3C58-553178F6BA69}"/>
               </a:ext>
             </a:extLst>
           </p:cNvPr>
@@ -32259,10 +31650,9 @@
           <a:lstStyle/>
           <a:p>
             <a:r>
-              <a:rPr lang="en-GB" dirty="0" err="1"/>
-              <a:t>Einführung</a:t>
+              <a:rPr lang="de-DE" dirty="0"/>
+              <a:t>Ziel</a:t>
             </a:r>
-            <a:endParaRPr lang="de-AT" dirty="0"/>
           </a:p>
         </p:txBody>
       </p:sp>
@@ -32271,7 +31661,7 @@
           <p:cNvPr id="3" name="Textplatzhalter 2">
             <a:extLst>
               <a:ext uri="{FF2B5EF4-FFF2-40B4-BE49-F238E27FC236}">
-                <a16:creationId xmlns:a16="http://schemas.microsoft.com/office/drawing/2014/main" id="{31820583-06D2-6D1F-BAAF-A8596E852D45}"/>
+                <a16:creationId xmlns:a16="http://schemas.microsoft.com/office/drawing/2014/main" id="{0D01C0C1-C372-6CC5-66DB-46CDE14A4D4C}"/>
               </a:ext>
             </a:extLst>
           </p:cNvPr>
@@ -32293,15 +31683,8 @@
             </a:pPr>
             <a:r>
               <a:rPr lang="en-GB" dirty="0"/>
-              <a:t>Raspberry Pi 5</a:t>
+              <a:t>Raspberry Pi Camera</a:t>
             </a:r>
-          </a:p>
-          <a:p>
-            <a:pPr marL="457200" indent="-457200">
-              <a:buFont typeface="Arial" panose="020B0604020202020204" pitchFamily="34" charset="0"/>
-              <a:buChar char="•"/>
-            </a:pPr>
-            <a:endParaRPr lang="de-AT" dirty="0"/>
           </a:p>
           <a:p>
             <a:pPr marL="457200" indent="-457200">
@@ -32310,23 +31693,8 @@
             </a:pPr>
             <a:r>
               <a:rPr lang="de-AT" dirty="0"/>
-              <a:t>Pi </a:t>
+              <a:t>Silhouette erstellen</a:t>
             </a:r>
-            <a:r>
-              <a:rPr lang="de-AT" dirty="0" err="1"/>
-              <a:t>Camera</a:t>
-            </a:r>
-            <a:r>
-              <a:rPr lang="de-AT" dirty="0"/>
-              <a:t> 3</a:t>
-            </a:r>
-          </a:p>
-          <a:p>
-            <a:pPr marL="457200" indent="-457200">
-              <a:buFont typeface="Arial" panose="020B0604020202020204" pitchFamily="34" charset="0"/>
-              <a:buChar char="•"/>
-            </a:pPr>
-            <a:endParaRPr lang="de-AT" dirty="0"/>
           </a:p>
           <a:p>
             <a:pPr marL="457200" indent="-457200">
@@ -32335,15 +31703,8 @@
             </a:pPr>
             <a:r>
               <a:rPr lang="de-AT" dirty="0"/>
-              <a:t>MAX7219</a:t>
+              <a:t>Auf die LEDs Skalieren</a:t>
             </a:r>
-          </a:p>
-          <a:p>
-            <a:pPr marL="457200" indent="-457200">
-              <a:buFont typeface="Arial" panose="020B0604020202020204" pitchFamily="34" charset="0"/>
-              <a:buChar char="•"/>
-            </a:pPr>
-            <a:endParaRPr lang="de-AT" dirty="0"/>
           </a:p>
           <a:p>
             <a:pPr marL="457200" indent="-457200">
@@ -32352,33 +31713,45 @@
             </a:pPr>
             <a:r>
               <a:rPr lang="de-AT" dirty="0"/>
-              <a:t>Verbindungsplatinen</a:t>
+              <a:t>Anzeige</a:t>
             </a:r>
-          </a:p>
-          <a:p>
-            <a:pPr marL="457200" indent="-457200">
-              <a:buFont typeface="Arial" panose="020B0604020202020204" pitchFamily="34" charset="0"/>
-              <a:buChar char="•"/>
-            </a:pPr>
-            <a:endParaRPr lang="de-AT" dirty="0"/>
-          </a:p>
-          <a:p>
-            <a:pPr marL="457200" indent="-457200">
-              <a:buFont typeface="Arial" panose="020B0604020202020204" pitchFamily="34" charset="0"/>
-              <a:buChar char="•"/>
-            </a:pPr>
-            <a:r>
-              <a:rPr lang="de-AT" dirty="0"/>
-              <a:t>Case</a:t>
-            </a:r>
-            <a:endParaRPr lang="en-GB" dirty="0"/>
           </a:p>
         </p:txBody>
       </p:sp>
+      <p:pic>
+        <p:nvPicPr>
+          <p:cNvPr id="9" name="Grafik 8">
+            <a:extLst>
+              <a:ext uri="{FF2B5EF4-FFF2-40B4-BE49-F238E27FC236}">
+                <a16:creationId xmlns:a16="http://schemas.microsoft.com/office/drawing/2014/main" id="{84F44C3E-7BD9-55AC-A74E-B91BCBBCC616}"/>
+              </a:ext>
+            </a:extLst>
+          </p:cNvPr>
+          <p:cNvPicPr>
+            <a:picLocks noChangeAspect="1"/>
+          </p:cNvPicPr>
+          <p:nvPr/>
+        </p:nvPicPr>
+        <p:blipFill>
+          <a:blip r:embed="rId2"/>
+          <a:stretch>
+            <a:fillRect/>
+          </a:stretch>
+        </p:blipFill>
+        <p:spPr>
+          <a:xfrm>
+            <a:off x="619002" y="5650345"/>
+            <a:ext cx="18866096" cy="2732750"/>
+          </a:xfrm>
+          <a:prstGeom prst="rect">
+            <a:avLst/>
+          </a:prstGeom>
+        </p:spPr>
+      </p:pic>
     </p:spTree>
     <p:extLst>
       <p:ext uri="{BB962C8B-B14F-4D97-AF65-F5344CB8AC3E}">
-        <p14:creationId xmlns:p14="http://schemas.microsoft.com/office/powerpoint/2010/main" val="1407555994"/>
+        <p14:creationId xmlns:p14="http://schemas.microsoft.com/office/powerpoint/2010/main" val="2583020303"/>
       </p:ext>
     </p:extLst>
   </p:cSld>
@@ -32388,158 +31761,7 @@
 </p:sld>
 </file>
 
-<file path=ppt/slides/slide4.xml><?xml version="1.0" encoding="utf-8"?>
-<p:sld xmlns:a="http://schemas.openxmlformats.org/drawingml/2006/main" xmlns:r="http://schemas.openxmlformats.org/officeDocument/2006/relationships" xmlns:p="http://schemas.openxmlformats.org/presentationml/2006/main">
-  <p:cSld>
-    <p:spTree>
-      <p:nvGrpSpPr>
-        <p:cNvPr id="1" name=""/>
-        <p:cNvGrpSpPr/>
-        <p:nvPr/>
-      </p:nvGrpSpPr>
-      <p:grpSpPr>
-        <a:xfrm>
-          <a:off x="0" y="0"/>
-          <a:ext cx="0" cy="0"/>
-          <a:chOff x="0" y="0"/>
-          <a:chExt cx="0" cy="0"/>
-        </a:xfrm>
-      </p:grpSpPr>
-      <p:sp>
-        <p:nvSpPr>
-          <p:cNvPr id="2" name="Textplatzhalter 1">
-            <a:extLst>
-              <a:ext uri="{FF2B5EF4-FFF2-40B4-BE49-F238E27FC236}">
-                <a16:creationId xmlns:a16="http://schemas.microsoft.com/office/drawing/2014/main" id="{A4247CE6-C5DF-5BE0-3E57-125A30C19661}"/>
-              </a:ext>
-            </a:extLst>
-          </p:cNvPr>
-          <p:cNvSpPr>
-            <a:spLocks noGrp="1"/>
-          </p:cNvSpPr>
-          <p:nvPr>
-            <p:ph type="body" idx="1"/>
-          </p:nvPr>
-        </p:nvSpPr>
-        <p:spPr/>
-        <p:txBody>
-          <a:bodyPr/>
-          <a:lstStyle/>
-          <a:p>
-            <a:r>
-              <a:rPr lang="de-DE" b="1" dirty="0"/>
-              <a:t>Robert</a:t>
-            </a:r>
-          </a:p>
-          <a:p>
-            <a:pPr marL="457200" indent="-457200">
-              <a:buFont typeface="Arial" panose="020B0604020202020204" pitchFamily="34" charset="0"/>
-              <a:buChar char="•"/>
-            </a:pPr>
-            <a:r>
-              <a:rPr lang="de-DE" sz="3200" dirty="0"/>
-              <a:t>Personenerfassung</a:t>
-            </a:r>
-          </a:p>
-          <a:p>
-            <a:pPr marL="457200" indent="-457200">
-              <a:buFont typeface="Arial" panose="020B0604020202020204" pitchFamily="34" charset="0"/>
-              <a:buChar char="•"/>
-            </a:pPr>
-            <a:r>
-              <a:rPr lang="de-DE" sz="3200" dirty="0"/>
-              <a:t>Kamera Ansteuerung</a:t>
-            </a:r>
-          </a:p>
-          <a:p>
-            <a:pPr marL="457200" indent="-457200">
-              <a:buFont typeface="Arial" panose="020B0604020202020204" pitchFamily="34" charset="0"/>
-              <a:buChar char="•"/>
-            </a:pPr>
-            <a:r>
-              <a:rPr lang="de-DE" sz="3200" dirty="0"/>
-              <a:t>Led-Matrix</a:t>
-            </a:r>
-          </a:p>
-          <a:p>
-            <a:pPr marL="457200" indent="-457200">
-              <a:buFont typeface="Arial" panose="020B0604020202020204" pitchFamily="34" charset="0"/>
-              <a:buChar char="•"/>
-            </a:pPr>
-            <a:r>
-              <a:rPr lang="de-DE" sz="3200" dirty="0"/>
-              <a:t>Simulation der Verbindungsplatinen</a:t>
-            </a:r>
-          </a:p>
-        </p:txBody>
-      </p:sp>
-      <p:sp>
-        <p:nvSpPr>
-          <p:cNvPr id="4" name="Titel 3">
-            <a:extLst>
-              <a:ext uri="{FF2B5EF4-FFF2-40B4-BE49-F238E27FC236}">
-                <a16:creationId xmlns:a16="http://schemas.microsoft.com/office/drawing/2014/main" id="{CA25091F-3040-312E-1644-E16FD502BC29}"/>
-              </a:ext>
-            </a:extLst>
-          </p:cNvPr>
-          <p:cNvSpPr>
-            <a:spLocks noGrp="1"/>
-          </p:cNvSpPr>
-          <p:nvPr>
-            <p:ph type="title"/>
-          </p:nvPr>
-        </p:nvSpPr>
-        <p:spPr/>
-        <p:txBody>
-          <a:bodyPr/>
-          <a:lstStyle/>
-          <a:p>
-            <a:r>
-              <a:rPr lang="de-DE" dirty="0"/>
-              <a:t>Robert</a:t>
-            </a:r>
-          </a:p>
-        </p:txBody>
-      </p:sp>
-      <p:sp>
-        <p:nvSpPr>
-          <p:cNvPr id="6" name="Textplatzhalter 5">
-            <a:extLst>
-              <a:ext uri="{FF2B5EF4-FFF2-40B4-BE49-F238E27FC236}">
-                <a16:creationId xmlns:a16="http://schemas.microsoft.com/office/drawing/2014/main" id="{15489D09-CEE7-0C2B-D5F6-A7B450EB1DAE}"/>
-              </a:ext>
-            </a:extLst>
-          </p:cNvPr>
-          <p:cNvSpPr>
-            <a:spLocks noGrp="1"/>
-          </p:cNvSpPr>
-          <p:nvPr>
-            <p:ph type="body" idx="10"/>
-          </p:nvPr>
-        </p:nvSpPr>
-        <p:spPr/>
-        <p:txBody>
-          <a:bodyPr/>
-          <a:lstStyle/>
-          <a:p>
-            <a:endParaRPr lang="de-AT"/>
-          </a:p>
-        </p:txBody>
-      </p:sp>
-    </p:spTree>
-    <p:extLst>
-      <p:ext uri="{BB962C8B-B14F-4D97-AF65-F5344CB8AC3E}">
-        <p14:creationId xmlns:p14="http://schemas.microsoft.com/office/powerpoint/2010/main" val="2987427198"/>
-      </p:ext>
-    </p:extLst>
-  </p:cSld>
-  <p:clrMapOvr>
-    <a:masterClrMapping/>
-  </p:clrMapOvr>
-</p:sld>
-</file>
-
-<file path=ppt/slides/slide5.xml><?xml version="1.0" encoding="utf-8"?>
+<file path=ppt/slides/slide3.xml><?xml version="1.0" encoding="utf-8"?>
 <p:sld xmlns:a="http://schemas.openxmlformats.org/drawingml/2006/main" xmlns:r="http://schemas.openxmlformats.org/officeDocument/2006/relationships" xmlns:p="http://schemas.openxmlformats.org/presentationml/2006/main">
   <p:cSld>
     <p:spTree>
@@ -32769,7 +31991,7 @@
 </p:sld>
 </file>
 
-<file path=ppt/slides/slide6.xml><?xml version="1.0" encoding="utf-8"?>
+<file path=ppt/slides/slide4.xml><?xml version="1.0" encoding="utf-8"?>
 <p:sld xmlns:a="http://schemas.openxmlformats.org/drawingml/2006/main" xmlns:r="http://schemas.openxmlformats.org/officeDocument/2006/relationships" xmlns:p="http://schemas.openxmlformats.org/presentationml/2006/main">
   <p:cSld>
     <p:spTree>
@@ -32974,7 +32196,7 @@
 </p:sld>
 </file>
 
-<file path=ppt/slides/slide7.xml><?xml version="1.0" encoding="utf-8"?>
+<file path=ppt/slides/slide5.xml><?xml version="1.0" encoding="utf-8"?>
 <p:sld xmlns:a="http://schemas.openxmlformats.org/drawingml/2006/main" xmlns:r="http://schemas.openxmlformats.org/officeDocument/2006/relationships" xmlns:p="http://schemas.openxmlformats.org/presentationml/2006/main">
   <p:cSld>
     <p:spTree>
@@ -33200,7 +32422,7 @@
 </p:sld>
 </file>
 
-<file path=ppt/slides/slide8.xml><?xml version="1.0" encoding="utf-8"?>
+<file path=ppt/slides/slide6.xml><?xml version="1.0" encoding="utf-8"?>
 <p:sld xmlns:a="http://schemas.openxmlformats.org/drawingml/2006/main" xmlns:r="http://schemas.openxmlformats.org/officeDocument/2006/relationships" xmlns:p="http://schemas.openxmlformats.org/presentationml/2006/main">
   <p:cSld>
     <p:spTree>
@@ -33433,7 +32655,7 @@
 </p:sld>
 </file>
 
-<file path=ppt/slides/slide9.xml><?xml version="1.0" encoding="utf-8"?>
+<file path=ppt/slides/slide7.xml><?xml version="1.0" encoding="utf-8"?>
 <p:sld xmlns:a="http://schemas.openxmlformats.org/drawingml/2006/main" xmlns:r="http://schemas.openxmlformats.org/officeDocument/2006/relationships" xmlns:p="http://schemas.openxmlformats.org/presentationml/2006/main">
   <p:cSld>
     <p:spTree>
@@ -33450,55 +32672,266 @@
           <a:chExt cx="0" cy="0"/>
         </a:xfrm>
       </p:grpSpPr>
-      <p:pic>
-        <p:nvPicPr>
-          <p:cNvPr id="7" name="Inhaltsplatzhalter 6" descr="Ein Bild, das Rechteck, Muster enthält.&#10;&#10;KI-generierte Inhalte können fehlerhaft sein.">
+      <p:sp>
+        <p:nvSpPr>
+          <p:cNvPr id="2" name="Titel 1">
             <a:extLst>
               <a:ext uri="{FF2B5EF4-FFF2-40B4-BE49-F238E27FC236}">
-                <a16:creationId xmlns:a16="http://schemas.microsoft.com/office/drawing/2014/main" id="{D4CF7975-27F8-04F0-CC6A-E1964A6C368C}"/>
+                <a16:creationId xmlns:a16="http://schemas.microsoft.com/office/drawing/2014/main" id="{1955C92F-439B-56AE-CA6D-26201BB15779}"/>
               </a:ext>
             </a:extLst>
           </p:cNvPr>
-          <p:cNvPicPr>
-            <a:picLocks noGrp="1" noChangeAspect="1"/>
-          </p:cNvPicPr>
+          <p:cNvSpPr>
+            <a:spLocks noGrp="1"/>
+          </p:cNvSpPr>
           <p:nvPr>
-            <p:ph sz="half" idx="3"/>
+            <p:ph type="title"/>
           </p:nvPr>
-        </p:nvPicPr>
-        <p:blipFill>
-          <a:blip r:embed="rId2"/>
-          <a:stretch>
-            <a:fillRect/>
-          </a:stretch>
-        </p:blipFill>
-        <p:spPr>
-          <a:xfrm>
-            <a:off x="10375838" y="3310698"/>
-            <a:ext cx="8745283" cy="5859338"/>
-          </a:xfrm>
-          <a:prstGeom prst="rect">
-            <a:avLst/>
-          </a:prstGeom>
-          <a:noFill/>
-          <a:ln>
-            <a:noFill/>
-          </a:ln>
-          <a:effectLst>
-            <a:outerShdw blurRad="292100" dist="139700" dir="2700000" algn="tl" rotWithShape="0">
-              <a:srgbClr val="333333">
-                <a:alpha val="65000"/>
-              </a:srgbClr>
-            </a:outerShdw>
-          </a:effectLst>
-        </p:spPr>
-      </p:pic>
+        </p:nvSpPr>
+        <p:spPr/>
+        <p:txBody>
+          <a:bodyPr/>
+          <a:lstStyle/>
+          <a:p>
+            <a:r>
+              <a:rPr lang="de-DE" dirty="0"/>
+              <a:t>Led-Matrix</a:t>
+            </a:r>
+          </a:p>
+        </p:txBody>
+      </p:sp>
       <p:sp>
         <p:nvSpPr>
           <p:cNvPr id="3" name="Textplatzhalter 2">
             <a:extLst>
               <a:ext uri="{FF2B5EF4-FFF2-40B4-BE49-F238E27FC236}">
-                <a16:creationId xmlns:a16="http://schemas.microsoft.com/office/drawing/2014/main" id="{194207CF-239B-5900-A0C7-BE4B995F42D8}"/>
+                <a16:creationId xmlns:a16="http://schemas.microsoft.com/office/drawing/2014/main" id="{1E1FFBDF-6056-A0D7-11FC-1F11CD5DD999}"/>
+              </a:ext>
+            </a:extLst>
+          </p:cNvPr>
+          <p:cNvSpPr>
+            <a:spLocks noGrp="1"/>
+          </p:cNvSpPr>
+          <p:nvPr>
+            <p:ph type="body" idx="1"/>
+          </p:nvPr>
+        </p:nvSpPr>
+        <p:spPr/>
+        <p:txBody>
+          <a:bodyPr/>
+          <a:lstStyle/>
+          <a:p>
+            <a:endParaRPr lang="de-DE" dirty="0"/>
+          </a:p>
+        </p:txBody>
+      </p:sp>
+    </p:spTree>
+    <p:extLst>
+      <p:ext uri="{BB962C8B-B14F-4D97-AF65-F5344CB8AC3E}">
+        <p14:creationId xmlns:p14="http://schemas.microsoft.com/office/powerpoint/2010/main" val="1688600938"/>
+      </p:ext>
+    </p:extLst>
+  </p:cSld>
+  <p:clrMapOvr>
+    <a:masterClrMapping/>
+  </p:clrMapOvr>
+</p:sld>
+</file>
+
+<file path=ppt/slides/slide8.xml><?xml version="1.0" encoding="utf-8"?>
+<p:sld xmlns:a="http://schemas.openxmlformats.org/drawingml/2006/main" xmlns:r="http://schemas.openxmlformats.org/officeDocument/2006/relationships" xmlns:p="http://schemas.openxmlformats.org/presentationml/2006/main">
+  <p:cSld>
+    <p:spTree>
+      <p:nvGrpSpPr>
+        <p:cNvPr id="1" name="">
+          <a:extLst>
+            <a:ext uri="{FF2B5EF4-FFF2-40B4-BE49-F238E27FC236}">
+              <a16:creationId xmlns:a16="http://schemas.microsoft.com/office/drawing/2014/main" id="{CC2E7DB2-F7B1-7BF1-0D7B-2941137A23A0}"/>
+            </a:ext>
+          </a:extLst>
+        </p:cNvPr>
+        <p:cNvGrpSpPr/>
+        <p:nvPr/>
+      </p:nvGrpSpPr>
+      <p:grpSpPr>
+        <a:xfrm>
+          <a:off x="0" y="0"/>
+          <a:ext cx="0" cy="0"/>
+          <a:chOff x="0" y="0"/>
+          <a:chExt cx="0" cy="0"/>
+        </a:xfrm>
+      </p:grpSpPr>
+      <p:sp>
+        <p:nvSpPr>
+          <p:cNvPr id="2" name="Textplatzhalter 1">
+            <a:extLst>
+              <a:ext uri="{FF2B5EF4-FFF2-40B4-BE49-F238E27FC236}">
+                <a16:creationId xmlns:a16="http://schemas.microsoft.com/office/drawing/2014/main" id="{4AFE4DCE-F842-74A0-C865-1527DF20CBD2}"/>
+              </a:ext>
+            </a:extLst>
+          </p:cNvPr>
+          <p:cNvSpPr>
+            <a:spLocks noGrp="1"/>
+          </p:cNvSpPr>
+          <p:nvPr>
+            <p:ph type="body" idx="1"/>
+          </p:nvPr>
+        </p:nvSpPr>
+        <p:spPr/>
+        <p:txBody>
+          <a:bodyPr/>
+          <a:lstStyle/>
+          <a:p>
+            <a:r>
+              <a:rPr lang="de-DE" b="1" dirty="0"/>
+              <a:t>Manuel</a:t>
+            </a:r>
+          </a:p>
+          <a:p>
+            <a:pPr marL="457200" indent="-457200">
+              <a:buFont typeface="Arial" panose="020B0604020202020204" pitchFamily="34" charset="0"/>
+              <a:buChar char="•"/>
+            </a:pPr>
+            <a:r>
+              <a:rPr lang="de-DE" sz="3200" dirty="0"/>
+              <a:t>Bildübertragung auf LED-Matrix</a:t>
+            </a:r>
+          </a:p>
+          <a:p>
+            <a:pPr marL="457200" indent="-457200">
+              <a:buFont typeface="Arial" panose="020B0604020202020204" pitchFamily="34" charset="0"/>
+              <a:buChar char="•"/>
+            </a:pPr>
+            <a:r>
+              <a:rPr lang="de-DE" sz="3200" dirty="0"/>
+              <a:t>Case und Platinen Designe </a:t>
+            </a:r>
+          </a:p>
+          <a:p>
+            <a:pPr marL="457200" indent="-457200">
+              <a:buFont typeface="Arial" panose="020B0604020202020204" pitchFamily="34" charset="0"/>
+              <a:buChar char="•"/>
+            </a:pPr>
+            <a:r>
+              <a:rPr lang="de-DE" sz="3200" dirty="0"/>
+              <a:t>Case Fertigung</a:t>
+            </a:r>
+          </a:p>
+          <a:p>
+            <a:pPr marL="457200" indent="-457200">
+              <a:buFont typeface="Arial" panose="020B0604020202020204" pitchFamily="34" charset="0"/>
+              <a:buChar char="•"/>
+            </a:pPr>
+            <a:r>
+              <a:rPr lang="de-DE" sz="3200" dirty="0"/>
+              <a:t>Dokumentation und </a:t>
+            </a:r>
+            <a:r>
+              <a:rPr lang="de-DE" sz="3200" dirty="0" err="1"/>
+              <a:t>Github</a:t>
+            </a:r>
+            <a:r>
+              <a:rPr lang="de-DE" sz="3200" dirty="0"/>
+              <a:t> Verwaltung</a:t>
+            </a:r>
+          </a:p>
+        </p:txBody>
+      </p:sp>
+      <p:sp>
+        <p:nvSpPr>
+          <p:cNvPr id="4" name="Titel 3">
+            <a:extLst>
+              <a:ext uri="{FF2B5EF4-FFF2-40B4-BE49-F238E27FC236}">
+                <a16:creationId xmlns:a16="http://schemas.microsoft.com/office/drawing/2014/main" id="{FB011655-2943-A858-7F43-18DC27D543EB}"/>
+              </a:ext>
+            </a:extLst>
+          </p:cNvPr>
+          <p:cNvSpPr>
+            <a:spLocks noGrp="1"/>
+          </p:cNvSpPr>
+          <p:nvPr>
+            <p:ph type="title"/>
+          </p:nvPr>
+        </p:nvSpPr>
+        <p:spPr/>
+        <p:txBody>
+          <a:bodyPr/>
+          <a:lstStyle/>
+          <a:p>
+            <a:r>
+              <a:rPr lang="de-DE" dirty="0"/>
+              <a:t>Manuel</a:t>
+            </a:r>
+          </a:p>
+        </p:txBody>
+      </p:sp>
+      <p:sp>
+        <p:nvSpPr>
+          <p:cNvPr id="6" name="Textplatzhalter 5">
+            <a:extLst>
+              <a:ext uri="{FF2B5EF4-FFF2-40B4-BE49-F238E27FC236}">
+                <a16:creationId xmlns:a16="http://schemas.microsoft.com/office/drawing/2014/main" id="{858E66CC-3F3B-A67C-89AB-B1B885F849F5}"/>
+              </a:ext>
+            </a:extLst>
+          </p:cNvPr>
+          <p:cNvSpPr>
+            <a:spLocks noGrp="1"/>
+          </p:cNvSpPr>
+          <p:nvPr>
+            <p:ph type="body" idx="10"/>
+          </p:nvPr>
+        </p:nvSpPr>
+        <p:spPr/>
+        <p:txBody>
+          <a:bodyPr/>
+          <a:lstStyle/>
+          <a:p>
+            <a:endParaRPr lang="de-AT" dirty="0"/>
+          </a:p>
+        </p:txBody>
+      </p:sp>
+    </p:spTree>
+    <p:extLst>
+      <p:ext uri="{BB962C8B-B14F-4D97-AF65-F5344CB8AC3E}">
+        <p14:creationId xmlns:p14="http://schemas.microsoft.com/office/powerpoint/2010/main" val="3230412208"/>
+      </p:ext>
+    </p:extLst>
+  </p:cSld>
+  <p:clrMapOvr>
+    <a:masterClrMapping/>
+  </p:clrMapOvr>
+</p:sld>
+</file>
+
+<file path=ppt/slides/slide9.xml><?xml version="1.0" encoding="utf-8"?>
+<p:sld xmlns:a="http://schemas.openxmlformats.org/drawingml/2006/main" xmlns:r="http://schemas.openxmlformats.org/officeDocument/2006/relationships" xmlns:p="http://schemas.openxmlformats.org/presentationml/2006/main">
+  <p:cSld>
+    <p:spTree>
+      <p:nvGrpSpPr>
+        <p:cNvPr id="1" name="">
+          <a:extLst>
+            <a:ext uri="{FF2B5EF4-FFF2-40B4-BE49-F238E27FC236}">
+              <a16:creationId xmlns:a16="http://schemas.microsoft.com/office/drawing/2014/main" id="{5EE128F7-77D5-E9C2-61C2-99E01B1FC181}"/>
+            </a:ext>
+          </a:extLst>
+        </p:cNvPr>
+        <p:cNvGrpSpPr/>
+        <p:nvPr/>
+      </p:nvGrpSpPr>
+      <p:grpSpPr>
+        <a:xfrm>
+          <a:off x="0" y="0"/>
+          <a:ext cx="0" cy="0"/>
+          <a:chOff x="0" y="0"/>
+          <a:chExt cx="0" cy="0"/>
+        </a:xfrm>
+      </p:grpSpPr>
+      <p:sp>
+        <p:nvSpPr>
+          <p:cNvPr id="3" name="Textplatzhalter 2">
+            <a:extLst>
+              <a:ext uri="{FF2B5EF4-FFF2-40B4-BE49-F238E27FC236}">
+                <a16:creationId xmlns:a16="http://schemas.microsoft.com/office/drawing/2014/main" id="{CBF53F7E-DC6C-0F13-47ED-C85CE327F3FB}"/>
               </a:ext>
             </a:extLst>
           </p:cNvPr>
@@ -33521,10 +32954,18 @@
           </a:bodyPr>
           <a:lstStyle/>
           <a:p>
+            <a:pPr>
+              <a:spcAft>
+                <a:spcPts val="600"/>
+              </a:spcAft>
+            </a:pPr>
+            <a:r>
+              <a:rPr lang="en-US" dirty="0"/>
+              <a:t>Main-Rework</a:t>
+            </a:r>
+          </a:p>
+          <a:p>
             <a:pPr marL="457200" indent="-457200">
-              <a:lnSpc>
-                <a:spcPct val="115000"/>
-              </a:lnSpc>
               <a:spcAft>
                 <a:spcPts val="600"/>
               </a:spcAft>
@@ -33532,15 +32973,20 @@
               <a:buChar char="•"/>
             </a:pPr>
             <a:r>
-              <a:rPr lang="en-GB" dirty="0"/>
-              <a:t>U shaped Pins</a:t>
+              <a:rPr lang="en-US" dirty="0"/>
+              <a:t>Neuer </a:t>
+            </a:r>
+            <a:r>
+              <a:rPr lang="en-US" dirty="0" err="1"/>
+              <a:t>Übersichtlicher</a:t>
+            </a:r>
+            <a:r>
+              <a:rPr lang="en-US" dirty="0"/>
+              <a:t> Aufbau </a:t>
             </a:r>
           </a:p>
           <a:p>
-            <a:pPr marL="457200" indent="-457200">
-              <a:lnSpc>
-                <a:spcPct val="115000"/>
-              </a:lnSpc>
+            <a:pPr marL="914400" lvl="1" indent="-457200">
               <a:spcAft>
                 <a:spcPts val="600"/>
               </a:spcAft>
@@ -33548,30 +32994,12 @@
               <a:buChar char="•"/>
             </a:pPr>
             <a:r>
-              <a:rPr lang="en-GB" dirty="0" err="1"/>
-              <a:t>Zwischenplatinen</a:t>
-            </a:r>
-            <a:endParaRPr lang="en-GB" dirty="0"/>
-          </a:p>
-          <a:p>
-            <a:pPr>
-              <a:lnSpc>
-                <a:spcPct val="115000"/>
-              </a:lnSpc>
-              <a:spcAft>
-                <a:spcPts val="600"/>
-              </a:spcAft>
-            </a:pPr>
-            <a:r>
-              <a:rPr lang="en-GB" dirty="0"/>
-              <a:t>Problem:</a:t>
+              <a:rPr lang="en-US" dirty="0"/>
+              <a:t>Software </a:t>
             </a:r>
           </a:p>
           <a:p>
-            <a:pPr marL="457200" indent="-457200">
-              <a:lnSpc>
-                <a:spcPct val="115000"/>
-              </a:lnSpc>
+            <a:pPr marL="914400" lvl="1" indent="-457200">
               <a:spcAft>
                 <a:spcPts val="600"/>
               </a:spcAft>
@@ -33579,15 +33007,17 @@
               <a:buChar char="•"/>
             </a:pPr>
             <a:r>
-              <a:rPr lang="de-AT" dirty="0"/>
-              <a:t>Erste 4 Reihen funktionierten einwandfrei</a:t>
+              <a:rPr lang="en-US" dirty="0"/>
+              <a:t>Simulation/</a:t>
             </a:r>
+            <a:r>
+              <a:rPr lang="en-US" dirty="0" err="1"/>
+              <a:t>Dokumentation</a:t>
+            </a:r>
+            <a:endParaRPr lang="en-US" dirty="0"/>
           </a:p>
           <a:p>
-            <a:pPr marL="457200" indent="-457200">
-              <a:lnSpc>
-                <a:spcPct val="115000"/>
-              </a:lnSpc>
+            <a:pPr marL="914400" lvl="1" indent="-457200">
               <a:spcAft>
                 <a:spcPts val="600"/>
               </a:spcAft>
@@ -33595,39 +33025,25 @@
               <a:buChar char="•"/>
             </a:pPr>
             <a:r>
-              <a:rPr lang="en-GB" dirty="0"/>
-              <a:t>Data In, </a:t>
+              <a:rPr lang="en-US" dirty="0"/>
+              <a:t>Setup </a:t>
             </a:r>
             <a:r>
-              <a:rPr lang="en-GB" dirty="0" err="1"/>
-              <a:t>clk</a:t>
+              <a:rPr lang="en-US" dirty="0" err="1"/>
+              <a:t>Guid</a:t>
             </a:r>
-            <a:r>
-              <a:rPr lang="en-GB" dirty="0"/>
-              <a:t> </a:t>
-            </a:r>
-            <a:r>
-              <a:rPr lang="en-GB" dirty="0" err="1"/>
-              <a:t>unerkennbar</a:t>
-            </a:r>
-            <a:r>
-              <a:rPr lang="en-GB" dirty="0"/>
-              <a:t> </a:t>
-            </a:r>
-            <a:r>
-              <a:rPr lang="en-GB" dirty="0" err="1"/>
-              <a:t>nach</a:t>
-            </a:r>
-            <a:r>
-              <a:rPr lang="en-GB" dirty="0"/>
-              <a:t> 1 Reihe</a:t>
-            </a:r>
+            <a:endParaRPr lang="en-US" dirty="0"/>
+          </a:p>
+          <a:p>
+            <a:pPr lvl="1">
+              <a:spcAft>
+                <a:spcPts val="600"/>
+              </a:spcAft>
+            </a:pPr>
+            <a:endParaRPr lang="en-US" dirty="0"/>
           </a:p>
           <a:p>
             <a:pPr marL="457200" indent="-457200">
-              <a:lnSpc>
-                <a:spcPct val="115000"/>
-              </a:lnSpc>
               <a:spcAft>
                 <a:spcPts val="600"/>
               </a:spcAft>
@@ -33635,32 +33051,53 @@
               <a:buChar char="•"/>
             </a:pPr>
             <a:r>
-              <a:rPr lang="en-GB" dirty="0" err="1"/>
-              <a:t>Lösung</a:t>
+              <a:rPr lang="en-US" dirty="0"/>
+              <a:t>READMEs mir </a:t>
             </a:r>
             <a:r>
-              <a:rPr lang="en-GB" dirty="0"/>
-              <a:t> : OPV-</a:t>
+              <a:rPr lang="en-US" dirty="0" err="1"/>
+              <a:t>erklärungen</a:t>
             </a:r>
             <a:r>
-              <a:rPr lang="en-GB" dirty="0" err="1"/>
-              <a:t>schmittrigger</a:t>
-            </a:r>
-            <a:r>
-              <a:rPr lang="en-GB" dirty="0"/>
+              <a:rPr lang="en-US" dirty="0"/>
               <a:t> </a:t>
             </a:r>
+          </a:p>
+          <a:p>
+            <a:pPr marL="457200" indent="-457200">
+              <a:spcAft>
+                <a:spcPts val="600"/>
+              </a:spcAft>
+              <a:buFont typeface="Arial" panose="020B0604020202020204" pitchFamily="34" charset="0"/>
+              <a:buChar char="•"/>
+            </a:pPr>
+            <a:endParaRPr lang="en-US" dirty="0"/>
+          </a:p>
+          <a:p>
+            <a:pPr marL="457200" indent="-457200">
+              <a:spcAft>
+                <a:spcPts val="600"/>
+              </a:spcAft>
+              <a:buFont typeface="Arial" panose="020B0604020202020204" pitchFamily="34" charset="0"/>
+              <a:buChar char="•"/>
+            </a:pPr>
             <a:r>
-              <a:rPr lang="en-GB" dirty="0" err="1"/>
-              <a:t>Schaltung</a:t>
+              <a:rPr lang="en-US" dirty="0"/>
+              <a:t>Code-Archive </a:t>
             </a:r>
-            <a:endParaRPr lang="en-GB" dirty="0"/>
+          </a:p>
+          <a:p>
+            <a:pPr marL="457200" indent="-457200">
+              <a:spcAft>
+                <a:spcPts val="600"/>
+              </a:spcAft>
+              <a:buFont typeface="Arial" panose="020B0604020202020204" pitchFamily="34" charset="0"/>
+              <a:buChar char="•"/>
+            </a:pPr>
+            <a:endParaRPr lang="en-US" dirty="0"/>
           </a:p>
           <a:p>
             <a:pPr>
-              <a:lnSpc>
-                <a:spcPct val="115000"/>
-              </a:lnSpc>
               <a:spcAft>
                 <a:spcPts val="600"/>
               </a:spcAft>
@@ -33674,7 +33111,7 @@
           <p:cNvPr id="4" name="Titel 3">
             <a:extLst>
               <a:ext uri="{FF2B5EF4-FFF2-40B4-BE49-F238E27FC236}">
-                <a16:creationId xmlns:a16="http://schemas.microsoft.com/office/drawing/2014/main" id="{F29BCFFB-C592-0008-CDD8-80730A301BE2}"/>
+                <a16:creationId xmlns:a16="http://schemas.microsoft.com/office/drawing/2014/main" id="{F4E0AC2E-E40F-B5EB-9EA1-6618B605182E}"/>
               </a:ext>
             </a:extLst>
           </p:cNvPr>
@@ -33698,17 +33135,57 @@
           <a:lstStyle/>
           <a:p>
             <a:r>
+              <a:rPr lang="en-GB" dirty="0" err="1"/>
+              <a:t>Neustrukturiereung</a:t>
+            </a:r>
+            <a:r>
               <a:rPr lang="en-GB" dirty="0"/>
-              <a:t>Led Matrix</a:t>
+              <a:t> </a:t>
+            </a:r>
+            <a:r>
+              <a:rPr lang="en-GB" dirty="0" err="1"/>
+              <a:t>Github</a:t>
             </a:r>
             <a:endParaRPr lang="de-AT" dirty="0"/>
           </a:p>
         </p:txBody>
       </p:sp>
+      <p:pic>
+        <p:nvPicPr>
+          <p:cNvPr id="8" name="Inhaltsplatzhalter 7">
+            <a:extLst>
+              <a:ext uri="{FF2B5EF4-FFF2-40B4-BE49-F238E27FC236}">
+                <a16:creationId xmlns:a16="http://schemas.microsoft.com/office/drawing/2014/main" id="{49D5B5DC-F66F-F669-39D5-8B91A478A543}"/>
+              </a:ext>
+            </a:extLst>
+          </p:cNvPr>
+          <p:cNvPicPr>
+            <a:picLocks noGrp="1" noChangeAspect="1"/>
+          </p:cNvPicPr>
+          <p:nvPr>
+            <p:ph sz="half" idx="3"/>
+          </p:nvPr>
+        </p:nvPicPr>
+        <p:blipFill>
+          <a:blip r:embed="rId2"/>
+          <a:stretch>
+            <a:fillRect/>
+          </a:stretch>
+        </p:blipFill>
+        <p:spPr>
+          <a:xfrm>
+            <a:off x="13292410" y="2148679"/>
+            <a:ext cx="4198596" cy="6961191"/>
+          </a:xfrm>
+          <a:prstGeom prst="rect">
+            <a:avLst/>
+          </a:prstGeom>
+        </p:spPr>
+      </p:pic>
     </p:spTree>
     <p:extLst>
       <p:ext uri="{BB962C8B-B14F-4D97-AF65-F5344CB8AC3E}">
-        <p14:creationId xmlns:p14="http://schemas.microsoft.com/office/powerpoint/2010/main" val="2085217513"/>
+        <p14:creationId xmlns:p14="http://schemas.microsoft.com/office/powerpoint/2010/main" val="1580370205"/>
       </p:ext>
     </p:extLst>
   </p:cSld>
